--- a/PostgreSQL流程图.pptx
+++ b/PostgreSQL流程图.pptx
@@ -6,6 +6,7 @@
   </p:sldMasterIdLst>
   <p:sldIdLst>
     <p:sldId id="256" r:id="rId2"/>
+    <p:sldId id="257" r:id="rId3"/>
   </p:sldIdLst>
   <p:sldSz cx="28800425" cy="18000663"/>
   <p:notesSz cx="6858000" cy="9144000"/>
@@ -243,7 +244,7 @@
           <a:p>
             <a:fld id="{9CAA280E-5F17-43A3-8076-0EEA6531207B}" type="datetimeFigureOut">
               <a:rPr lang="zh-CN" altLang="en-US" smtClean="0"/>
-              <a:t>2021-1-26</a:t>
+              <a:t>2021-2-22</a:t>
             </a:fld>
             <a:endParaRPr lang="zh-CN" altLang="en-US"/>
           </a:p>
@@ -413,7 +414,7 @@
           <a:p>
             <a:fld id="{9CAA280E-5F17-43A3-8076-0EEA6531207B}" type="datetimeFigureOut">
               <a:rPr lang="zh-CN" altLang="en-US" smtClean="0"/>
-              <a:t>2021-1-26</a:t>
+              <a:t>2021-2-22</a:t>
             </a:fld>
             <a:endParaRPr lang="zh-CN" altLang="en-US"/>
           </a:p>
@@ -593,7 +594,7 @@
           <a:p>
             <a:fld id="{9CAA280E-5F17-43A3-8076-0EEA6531207B}" type="datetimeFigureOut">
               <a:rPr lang="zh-CN" altLang="en-US" smtClean="0"/>
-              <a:t>2021-1-26</a:t>
+              <a:t>2021-2-22</a:t>
             </a:fld>
             <a:endParaRPr lang="zh-CN" altLang="en-US"/>
           </a:p>
@@ -763,7 +764,7 @@
           <a:p>
             <a:fld id="{9CAA280E-5F17-43A3-8076-0EEA6531207B}" type="datetimeFigureOut">
               <a:rPr lang="zh-CN" altLang="en-US" smtClean="0"/>
-              <a:t>2021-1-26</a:t>
+              <a:t>2021-2-22</a:t>
             </a:fld>
             <a:endParaRPr lang="zh-CN" altLang="en-US"/>
           </a:p>
@@ -1009,7 +1010,7 @@
           <a:p>
             <a:fld id="{9CAA280E-5F17-43A3-8076-0EEA6531207B}" type="datetimeFigureOut">
               <a:rPr lang="zh-CN" altLang="en-US" smtClean="0"/>
-              <a:t>2021-1-26</a:t>
+              <a:t>2021-2-22</a:t>
             </a:fld>
             <a:endParaRPr lang="zh-CN" altLang="en-US"/>
           </a:p>
@@ -1241,7 +1242,7 @@
           <a:p>
             <a:fld id="{9CAA280E-5F17-43A3-8076-0EEA6531207B}" type="datetimeFigureOut">
               <a:rPr lang="zh-CN" altLang="en-US" smtClean="0"/>
-              <a:t>2021-1-26</a:t>
+              <a:t>2021-2-22</a:t>
             </a:fld>
             <a:endParaRPr lang="zh-CN" altLang="en-US"/>
           </a:p>
@@ -1608,7 +1609,7 @@
           <a:p>
             <a:fld id="{9CAA280E-5F17-43A3-8076-0EEA6531207B}" type="datetimeFigureOut">
               <a:rPr lang="zh-CN" altLang="en-US" smtClean="0"/>
-              <a:t>2021-1-26</a:t>
+              <a:t>2021-2-22</a:t>
             </a:fld>
             <a:endParaRPr lang="zh-CN" altLang="en-US"/>
           </a:p>
@@ -1726,7 +1727,7 @@
           <a:p>
             <a:fld id="{9CAA280E-5F17-43A3-8076-0EEA6531207B}" type="datetimeFigureOut">
               <a:rPr lang="zh-CN" altLang="en-US" smtClean="0"/>
-              <a:t>2021-1-26</a:t>
+              <a:t>2021-2-22</a:t>
             </a:fld>
             <a:endParaRPr lang="zh-CN" altLang="en-US"/>
           </a:p>
@@ -1821,7 +1822,7 @@
           <a:p>
             <a:fld id="{9CAA280E-5F17-43A3-8076-0EEA6531207B}" type="datetimeFigureOut">
               <a:rPr lang="zh-CN" altLang="en-US" smtClean="0"/>
-              <a:t>2021-1-26</a:t>
+              <a:t>2021-2-22</a:t>
             </a:fld>
             <a:endParaRPr lang="zh-CN" altLang="en-US"/>
           </a:p>
@@ -2098,7 +2099,7 @@
           <a:p>
             <a:fld id="{9CAA280E-5F17-43A3-8076-0EEA6531207B}" type="datetimeFigureOut">
               <a:rPr lang="zh-CN" altLang="en-US" smtClean="0"/>
-              <a:t>2021-1-26</a:t>
+              <a:t>2021-2-22</a:t>
             </a:fld>
             <a:endParaRPr lang="zh-CN" altLang="en-US"/>
           </a:p>
@@ -2355,7 +2356,7 @@
           <a:p>
             <a:fld id="{9CAA280E-5F17-43A3-8076-0EEA6531207B}" type="datetimeFigureOut">
               <a:rPr lang="zh-CN" altLang="en-US" smtClean="0"/>
-              <a:t>2021-1-26</a:t>
+              <a:t>2021-2-22</a:t>
             </a:fld>
             <a:endParaRPr lang="zh-CN" altLang="en-US"/>
           </a:p>
@@ -2568,7 +2569,7 @@
           <a:p>
             <a:fld id="{9CAA280E-5F17-43A3-8076-0EEA6531207B}" type="datetimeFigureOut">
               <a:rPr lang="zh-CN" altLang="en-US" smtClean="0"/>
-              <a:t>2021-1-26</a:t>
+              <a:t>2021-2-22</a:t>
             </a:fld>
             <a:endParaRPr lang="zh-CN" altLang="en-US"/>
           </a:p>
@@ -6762,6 +6763,3000 @@
 </p:sld>
 </file>
 
+<file path=ppt/slides/slide2.xml><?xml version="1.0" encoding="utf-8"?>
+<p:sld xmlns:a="http://schemas.openxmlformats.org/drawingml/2006/main" xmlns:r="http://schemas.openxmlformats.org/officeDocument/2006/relationships" xmlns:p="http://schemas.openxmlformats.org/presentationml/2006/main">
+  <p:cSld>
+    <p:spTree>
+      <p:nvGrpSpPr>
+        <p:cNvPr id="1" name=""/>
+        <p:cNvGrpSpPr/>
+        <p:nvPr/>
+      </p:nvGrpSpPr>
+      <p:grpSpPr>
+        <a:xfrm>
+          <a:off x="0" y="0"/>
+          <a:ext cx="0" cy="0"/>
+          <a:chOff x="0" y="0"/>
+          <a:chExt cx="0" cy="0"/>
+        </a:xfrm>
+      </p:grpSpPr>
+      <p:sp>
+        <p:nvSpPr>
+          <p:cNvPr id="4" name="文本框 3">
+            <a:extLst>
+              <a:ext uri="{FF2B5EF4-FFF2-40B4-BE49-F238E27FC236}">
+                <a16:creationId xmlns:a16="http://schemas.microsoft.com/office/drawing/2014/main" id="{4093B32F-959F-4E36-BC2C-0A4DDE49AA1C}"/>
+              </a:ext>
+            </a:extLst>
+          </p:cNvPr>
+          <p:cNvSpPr txBox="1"/>
+          <p:nvPr/>
+        </p:nvSpPr>
+        <p:spPr>
+          <a:xfrm>
+            <a:off x="8082626" y="3931671"/>
+            <a:ext cx="590226" cy="276999"/>
+          </a:xfrm>
+          <a:prstGeom prst="rect">
+            <a:avLst/>
+          </a:prstGeom>
+          <a:noFill/>
+        </p:spPr>
+        <p:txBody>
+          <a:bodyPr wrap="none" rtlCol="0">
+            <a:spAutoFit/>
+          </a:bodyPr>
+          <a:lstStyle/>
+          <a:p>
+            <a:r>
+              <a:rPr lang="en-US" altLang="zh-CN" sz="1200" dirty="0"/>
+              <a:t>Query</a:t>
+            </a:r>
+            <a:endParaRPr lang="zh-CN" altLang="en-US" sz="1200" dirty="0"/>
+          </a:p>
+        </p:txBody>
+      </p:sp>
+      <p:sp>
+        <p:nvSpPr>
+          <p:cNvPr id="5" name="文本框 4">
+            <a:extLst>
+              <a:ext uri="{FF2B5EF4-FFF2-40B4-BE49-F238E27FC236}">
+                <a16:creationId xmlns:a16="http://schemas.microsoft.com/office/drawing/2014/main" id="{7AB559A0-FAD2-40E3-BB33-C47D0B30A699}"/>
+              </a:ext>
+            </a:extLst>
+          </p:cNvPr>
+          <p:cNvSpPr txBox="1"/>
+          <p:nvPr/>
+        </p:nvSpPr>
+        <p:spPr>
+          <a:xfrm>
+            <a:off x="5895420" y="4841465"/>
+            <a:ext cx="777777" cy="461665"/>
+          </a:xfrm>
+          <a:prstGeom prst="rect">
+            <a:avLst/>
+          </a:prstGeom>
+          <a:noFill/>
+        </p:spPr>
+        <p:txBody>
+          <a:bodyPr wrap="none" rtlCol="0">
+            <a:spAutoFit/>
+          </a:bodyPr>
+          <a:lstStyle/>
+          <a:p>
+            <a:r>
+              <a:rPr lang="en-US" altLang="zh-CN" sz="1200" dirty="0" err="1"/>
+              <a:t>rtable:list</a:t>
+            </a:r>
+            <a:endParaRPr lang="en-US" altLang="zh-CN" sz="1200" dirty="0"/>
+          </a:p>
+          <a:p>
+            <a:r>
+              <a:rPr lang="en-US" altLang="zh-CN" sz="1200" dirty="0"/>
+              <a:t>2 items</a:t>
+            </a:r>
+            <a:endParaRPr lang="zh-CN" altLang="en-US" sz="1200" dirty="0"/>
+          </a:p>
+        </p:txBody>
+      </p:sp>
+      <p:cxnSp>
+        <p:nvCxnSpPr>
+          <p:cNvPr id="6" name="直接连接符 5">
+            <a:extLst>
+              <a:ext uri="{FF2B5EF4-FFF2-40B4-BE49-F238E27FC236}">
+                <a16:creationId xmlns:a16="http://schemas.microsoft.com/office/drawing/2014/main" id="{C6CD582C-7549-46E4-9D0A-05413476BEF3}"/>
+              </a:ext>
+            </a:extLst>
+          </p:cNvPr>
+          <p:cNvCxnSpPr>
+            <a:stCxn id="4" idx="2"/>
+            <a:endCxn id="5" idx="0"/>
+          </p:cNvCxnSpPr>
+          <p:nvPr/>
+        </p:nvCxnSpPr>
+        <p:spPr>
+          <a:xfrm flipH="1">
+            <a:off x="6284309" y="4208670"/>
+            <a:ext cx="2093430" cy="632795"/>
+          </a:xfrm>
+          <a:prstGeom prst="line">
+            <a:avLst/>
+          </a:prstGeom>
+        </p:spPr>
+        <p:style>
+          <a:lnRef idx="1">
+            <a:schemeClr val="accent1"/>
+          </a:lnRef>
+          <a:fillRef idx="0">
+            <a:schemeClr val="accent1"/>
+          </a:fillRef>
+          <a:effectRef idx="0">
+            <a:schemeClr val="accent1"/>
+          </a:effectRef>
+          <a:fontRef idx="minor">
+            <a:schemeClr val="tx1"/>
+          </a:fontRef>
+        </p:style>
+      </p:cxnSp>
+      <p:sp>
+        <p:nvSpPr>
+          <p:cNvPr id="7" name="文本框 6">
+            <a:extLst>
+              <a:ext uri="{FF2B5EF4-FFF2-40B4-BE49-F238E27FC236}">
+                <a16:creationId xmlns:a16="http://schemas.microsoft.com/office/drawing/2014/main" id="{EDE7946C-1EAE-4292-B005-264D63971B3F}"/>
+              </a:ext>
+            </a:extLst>
+          </p:cNvPr>
+          <p:cNvSpPr txBox="1"/>
+          <p:nvPr/>
+        </p:nvSpPr>
+        <p:spPr>
+          <a:xfrm>
+            <a:off x="4478878" y="5638350"/>
+            <a:ext cx="1110497" cy="646331"/>
+          </a:xfrm>
+          <a:prstGeom prst="rect">
+            <a:avLst/>
+          </a:prstGeom>
+          <a:noFill/>
+        </p:spPr>
+        <p:txBody>
+          <a:bodyPr wrap="none" rtlCol="0">
+            <a:spAutoFit/>
+          </a:bodyPr>
+          <a:lstStyle/>
+          <a:p>
+            <a:r>
+              <a:rPr lang="en-US" altLang="zh-CN" sz="1200" dirty="0"/>
+              <a:t>      1:RTE</a:t>
+            </a:r>
+          </a:p>
+          <a:p>
+            <a:r>
+              <a:rPr lang="en-US" altLang="zh-CN" sz="1200" dirty="0"/>
+              <a:t>RTE_RELATION</a:t>
+            </a:r>
+          </a:p>
+          <a:p>
+            <a:r>
+              <a:rPr lang="en-US" altLang="zh-CN" sz="1200" dirty="0"/>
+              <a:t>‘a’/16394/’r’</a:t>
+            </a:r>
+            <a:endParaRPr lang="zh-CN" altLang="en-US" sz="1200" dirty="0"/>
+          </a:p>
+        </p:txBody>
+      </p:sp>
+      <p:sp>
+        <p:nvSpPr>
+          <p:cNvPr id="8" name="文本框 7">
+            <a:extLst>
+              <a:ext uri="{FF2B5EF4-FFF2-40B4-BE49-F238E27FC236}">
+                <a16:creationId xmlns:a16="http://schemas.microsoft.com/office/drawing/2014/main" id="{37EADDDA-70AC-4C4D-9661-FC65510C6409}"/>
+              </a:ext>
+            </a:extLst>
+          </p:cNvPr>
+          <p:cNvSpPr txBox="1"/>
+          <p:nvPr/>
+        </p:nvSpPr>
+        <p:spPr>
+          <a:xfrm>
+            <a:off x="6442817" y="5763842"/>
+            <a:ext cx="1389868" cy="461665"/>
+          </a:xfrm>
+          <a:prstGeom prst="rect">
+            <a:avLst/>
+          </a:prstGeom>
+          <a:noFill/>
+        </p:spPr>
+        <p:txBody>
+          <a:bodyPr wrap="none" rtlCol="0">
+            <a:spAutoFit/>
+          </a:bodyPr>
+          <a:lstStyle/>
+          <a:p>
+            <a:r>
+              <a:rPr lang="en-US" altLang="zh-CN" sz="1200" dirty="0"/>
+              <a:t>      2:RTE</a:t>
+            </a:r>
+          </a:p>
+          <a:p>
+            <a:r>
+              <a:rPr lang="en-US" altLang="zh-CN" sz="1200" dirty="0"/>
+              <a:t>RTE_SUBQUERY/’b’</a:t>
+            </a:r>
+            <a:endParaRPr lang="zh-CN" altLang="en-US" sz="1200" dirty="0"/>
+          </a:p>
+        </p:txBody>
+      </p:sp>
+      <p:cxnSp>
+        <p:nvCxnSpPr>
+          <p:cNvPr id="9" name="直接连接符 8">
+            <a:extLst>
+              <a:ext uri="{FF2B5EF4-FFF2-40B4-BE49-F238E27FC236}">
+                <a16:creationId xmlns:a16="http://schemas.microsoft.com/office/drawing/2014/main" id="{02B67D81-2EEF-4FD1-98C7-F6FBFC1AFDF8}"/>
+              </a:ext>
+            </a:extLst>
+          </p:cNvPr>
+          <p:cNvCxnSpPr>
+            <a:stCxn id="5" idx="2"/>
+            <a:endCxn id="7" idx="0"/>
+          </p:cNvCxnSpPr>
+          <p:nvPr/>
+        </p:nvCxnSpPr>
+        <p:spPr>
+          <a:xfrm flipH="1">
+            <a:off x="5034127" y="5303130"/>
+            <a:ext cx="1250182" cy="335220"/>
+          </a:xfrm>
+          <a:prstGeom prst="line">
+            <a:avLst/>
+          </a:prstGeom>
+        </p:spPr>
+        <p:style>
+          <a:lnRef idx="1">
+            <a:schemeClr val="accent1"/>
+          </a:lnRef>
+          <a:fillRef idx="0">
+            <a:schemeClr val="accent1"/>
+          </a:fillRef>
+          <a:effectRef idx="0">
+            <a:schemeClr val="accent1"/>
+          </a:effectRef>
+          <a:fontRef idx="minor">
+            <a:schemeClr val="tx1"/>
+          </a:fontRef>
+        </p:style>
+      </p:cxnSp>
+      <p:cxnSp>
+        <p:nvCxnSpPr>
+          <p:cNvPr id="10" name="直接连接符 9">
+            <a:extLst>
+              <a:ext uri="{FF2B5EF4-FFF2-40B4-BE49-F238E27FC236}">
+                <a16:creationId xmlns:a16="http://schemas.microsoft.com/office/drawing/2014/main" id="{917175DC-E3C6-4758-B267-8B50B8D5B47F}"/>
+              </a:ext>
+            </a:extLst>
+          </p:cNvPr>
+          <p:cNvCxnSpPr>
+            <a:stCxn id="5" idx="2"/>
+            <a:endCxn id="8" idx="0"/>
+          </p:cNvCxnSpPr>
+          <p:nvPr/>
+        </p:nvCxnSpPr>
+        <p:spPr>
+          <a:xfrm>
+            <a:off x="6284309" y="5303130"/>
+            <a:ext cx="853442" cy="460712"/>
+          </a:xfrm>
+          <a:prstGeom prst="line">
+            <a:avLst/>
+          </a:prstGeom>
+        </p:spPr>
+        <p:style>
+          <a:lnRef idx="1">
+            <a:schemeClr val="accent1"/>
+          </a:lnRef>
+          <a:fillRef idx="0">
+            <a:schemeClr val="accent1"/>
+          </a:fillRef>
+          <a:effectRef idx="0">
+            <a:schemeClr val="accent1"/>
+          </a:effectRef>
+          <a:fontRef idx="minor">
+            <a:schemeClr val="tx1"/>
+          </a:fontRef>
+        </p:style>
+      </p:cxnSp>
+      <p:sp>
+        <p:nvSpPr>
+          <p:cNvPr id="11" name="文本框 10">
+            <a:extLst>
+              <a:ext uri="{FF2B5EF4-FFF2-40B4-BE49-F238E27FC236}">
+                <a16:creationId xmlns:a16="http://schemas.microsoft.com/office/drawing/2014/main" id="{11187090-6A34-4083-952C-BC6F299CAA49}"/>
+              </a:ext>
+            </a:extLst>
+          </p:cNvPr>
+          <p:cNvSpPr txBox="1"/>
+          <p:nvPr/>
+        </p:nvSpPr>
+        <p:spPr>
+          <a:xfrm>
+            <a:off x="10125518" y="5198397"/>
+            <a:ext cx="1329659" cy="276999"/>
+          </a:xfrm>
+          <a:prstGeom prst="rect">
+            <a:avLst/>
+          </a:prstGeom>
+          <a:noFill/>
+        </p:spPr>
+        <p:txBody>
+          <a:bodyPr wrap="none" rtlCol="0">
+            <a:spAutoFit/>
+          </a:bodyPr>
+          <a:lstStyle/>
+          <a:p>
+            <a:r>
+              <a:rPr lang="en-US" altLang="zh-CN" sz="1200" dirty="0" err="1"/>
+              <a:t>jointree:FromExpr</a:t>
+            </a:r>
+            <a:endParaRPr lang="zh-CN" altLang="en-US" sz="1200" dirty="0"/>
+          </a:p>
+        </p:txBody>
+      </p:sp>
+      <p:cxnSp>
+        <p:nvCxnSpPr>
+          <p:cNvPr id="12" name="直接连接符 11">
+            <a:extLst>
+              <a:ext uri="{FF2B5EF4-FFF2-40B4-BE49-F238E27FC236}">
+                <a16:creationId xmlns:a16="http://schemas.microsoft.com/office/drawing/2014/main" id="{2DD85663-887A-40FF-971A-7693B299F920}"/>
+              </a:ext>
+            </a:extLst>
+          </p:cNvPr>
+          <p:cNvCxnSpPr>
+            <a:stCxn id="4" idx="2"/>
+            <a:endCxn id="11" idx="0"/>
+          </p:cNvCxnSpPr>
+          <p:nvPr/>
+        </p:nvCxnSpPr>
+        <p:spPr>
+          <a:xfrm>
+            <a:off x="8377739" y="4208670"/>
+            <a:ext cx="2412609" cy="989727"/>
+          </a:xfrm>
+          <a:prstGeom prst="line">
+            <a:avLst/>
+          </a:prstGeom>
+        </p:spPr>
+        <p:style>
+          <a:lnRef idx="1">
+            <a:schemeClr val="accent1"/>
+          </a:lnRef>
+          <a:fillRef idx="0">
+            <a:schemeClr val="accent1"/>
+          </a:fillRef>
+          <a:effectRef idx="0">
+            <a:schemeClr val="accent1"/>
+          </a:effectRef>
+          <a:fontRef idx="minor">
+            <a:schemeClr val="tx1"/>
+          </a:fontRef>
+        </p:style>
+      </p:cxnSp>
+      <p:sp>
+        <p:nvSpPr>
+          <p:cNvPr id="13" name="文本框 12">
+            <a:extLst>
+              <a:ext uri="{FF2B5EF4-FFF2-40B4-BE49-F238E27FC236}">
+                <a16:creationId xmlns:a16="http://schemas.microsoft.com/office/drawing/2014/main" id="{153E4788-8A89-459B-A8DD-765D9EB974D5}"/>
+              </a:ext>
+            </a:extLst>
+          </p:cNvPr>
+          <p:cNvSpPr txBox="1"/>
+          <p:nvPr/>
+        </p:nvSpPr>
+        <p:spPr>
+          <a:xfrm>
+            <a:off x="12041862" y="5059898"/>
+            <a:ext cx="1018292" cy="461665"/>
+          </a:xfrm>
+          <a:prstGeom prst="rect">
+            <a:avLst/>
+          </a:prstGeom>
+          <a:noFill/>
+        </p:spPr>
+        <p:txBody>
+          <a:bodyPr wrap="none" rtlCol="0">
+            <a:spAutoFit/>
+          </a:bodyPr>
+          <a:lstStyle/>
+          <a:p>
+            <a:r>
+              <a:rPr lang="en-US" altLang="zh-CN" sz="1200" dirty="0" err="1"/>
+              <a:t>targetList:List</a:t>
+            </a:r>
+            <a:endParaRPr lang="en-US" altLang="zh-CN" sz="1200" dirty="0"/>
+          </a:p>
+          <a:p>
+            <a:r>
+              <a:rPr lang="en-US" altLang="zh-CN" sz="1200" dirty="0"/>
+              <a:t>      4 items</a:t>
+            </a:r>
+            <a:endParaRPr lang="zh-CN" altLang="en-US" sz="1200" dirty="0"/>
+          </a:p>
+        </p:txBody>
+      </p:sp>
+      <p:cxnSp>
+        <p:nvCxnSpPr>
+          <p:cNvPr id="14" name="直接连接符 13">
+            <a:extLst>
+              <a:ext uri="{FF2B5EF4-FFF2-40B4-BE49-F238E27FC236}">
+                <a16:creationId xmlns:a16="http://schemas.microsoft.com/office/drawing/2014/main" id="{EA16F0ED-2F4F-43A9-8098-24D056DBCD4E}"/>
+              </a:ext>
+            </a:extLst>
+          </p:cNvPr>
+          <p:cNvCxnSpPr>
+            <a:stCxn id="4" idx="2"/>
+            <a:endCxn id="13" idx="0"/>
+          </p:cNvCxnSpPr>
+          <p:nvPr/>
+        </p:nvCxnSpPr>
+        <p:spPr>
+          <a:xfrm>
+            <a:off x="8377739" y="4208670"/>
+            <a:ext cx="4173269" cy="851228"/>
+          </a:xfrm>
+          <a:prstGeom prst="line">
+            <a:avLst/>
+          </a:prstGeom>
+        </p:spPr>
+        <p:style>
+          <a:lnRef idx="1">
+            <a:schemeClr val="accent1"/>
+          </a:lnRef>
+          <a:fillRef idx="0">
+            <a:schemeClr val="accent1"/>
+          </a:fillRef>
+          <a:effectRef idx="0">
+            <a:schemeClr val="accent1"/>
+          </a:effectRef>
+          <a:fontRef idx="minor">
+            <a:schemeClr val="tx1"/>
+          </a:fontRef>
+        </p:style>
+      </p:cxnSp>
+      <p:sp>
+        <p:nvSpPr>
+          <p:cNvPr id="15" name="文本框 14">
+            <a:extLst>
+              <a:ext uri="{FF2B5EF4-FFF2-40B4-BE49-F238E27FC236}">
+                <a16:creationId xmlns:a16="http://schemas.microsoft.com/office/drawing/2014/main" id="{95BD5C28-32F7-4AD7-8FB3-D749BDF35BE7}"/>
+              </a:ext>
+            </a:extLst>
+          </p:cNvPr>
+          <p:cNvSpPr txBox="1"/>
+          <p:nvPr/>
+        </p:nvSpPr>
+        <p:spPr>
+          <a:xfrm>
+            <a:off x="8683815" y="5816064"/>
+            <a:ext cx="667747" cy="276999"/>
+          </a:xfrm>
+          <a:prstGeom prst="rect">
+            <a:avLst/>
+          </a:prstGeom>
+          <a:noFill/>
+        </p:spPr>
+        <p:txBody>
+          <a:bodyPr wrap="none" rtlCol="0">
+            <a:spAutoFit/>
+          </a:bodyPr>
+          <a:lstStyle/>
+          <a:p>
+            <a:r>
+              <a:rPr lang="en-US" altLang="zh-CN" sz="1200" dirty="0" err="1"/>
+              <a:t>fromlist</a:t>
+            </a:r>
+            <a:endParaRPr lang="zh-CN" altLang="en-US" sz="1200" dirty="0"/>
+          </a:p>
+        </p:txBody>
+      </p:sp>
+      <p:sp>
+        <p:nvSpPr>
+          <p:cNvPr id="16" name="文本框 15">
+            <a:extLst>
+              <a:ext uri="{FF2B5EF4-FFF2-40B4-BE49-F238E27FC236}">
+                <a16:creationId xmlns:a16="http://schemas.microsoft.com/office/drawing/2014/main" id="{736B1F3D-7DD7-452A-B08F-7271E144C672}"/>
+              </a:ext>
+            </a:extLst>
+          </p:cNvPr>
+          <p:cNvSpPr txBox="1"/>
+          <p:nvPr/>
+        </p:nvSpPr>
+        <p:spPr>
+          <a:xfrm>
+            <a:off x="11171413" y="6093063"/>
+            <a:ext cx="1015021" cy="276999"/>
+          </a:xfrm>
+          <a:prstGeom prst="rect">
+            <a:avLst/>
+          </a:prstGeom>
+          <a:noFill/>
+        </p:spPr>
+        <p:txBody>
+          <a:bodyPr wrap="none" rtlCol="0">
+            <a:spAutoFit/>
+          </a:bodyPr>
+          <a:lstStyle/>
+          <a:p>
+            <a:r>
+              <a:rPr lang="en-US" altLang="zh-CN" sz="1200" dirty="0" err="1"/>
+              <a:t>quals:OpExpr</a:t>
+            </a:r>
+            <a:endParaRPr lang="zh-CN" altLang="en-US" sz="1200" dirty="0"/>
+          </a:p>
+        </p:txBody>
+      </p:sp>
+      <p:cxnSp>
+        <p:nvCxnSpPr>
+          <p:cNvPr id="17" name="直接连接符 16">
+            <a:extLst>
+              <a:ext uri="{FF2B5EF4-FFF2-40B4-BE49-F238E27FC236}">
+                <a16:creationId xmlns:a16="http://schemas.microsoft.com/office/drawing/2014/main" id="{E4B7C468-2DE1-4BC5-8E21-27E81A8AACED}"/>
+              </a:ext>
+            </a:extLst>
+          </p:cNvPr>
+          <p:cNvCxnSpPr>
+            <a:stCxn id="11" idx="2"/>
+            <a:endCxn id="15" idx="0"/>
+          </p:cNvCxnSpPr>
+          <p:nvPr/>
+        </p:nvCxnSpPr>
+        <p:spPr>
+          <a:xfrm flipH="1">
+            <a:off x="9017689" y="5475396"/>
+            <a:ext cx="1772659" cy="340668"/>
+          </a:xfrm>
+          <a:prstGeom prst="line">
+            <a:avLst/>
+          </a:prstGeom>
+        </p:spPr>
+        <p:style>
+          <a:lnRef idx="1">
+            <a:schemeClr val="accent1"/>
+          </a:lnRef>
+          <a:fillRef idx="0">
+            <a:schemeClr val="accent1"/>
+          </a:fillRef>
+          <a:effectRef idx="0">
+            <a:schemeClr val="accent1"/>
+          </a:effectRef>
+          <a:fontRef idx="minor">
+            <a:schemeClr val="tx1"/>
+          </a:fontRef>
+        </p:style>
+      </p:cxnSp>
+      <p:cxnSp>
+        <p:nvCxnSpPr>
+          <p:cNvPr id="18" name="直接连接符 17">
+            <a:extLst>
+              <a:ext uri="{FF2B5EF4-FFF2-40B4-BE49-F238E27FC236}">
+                <a16:creationId xmlns:a16="http://schemas.microsoft.com/office/drawing/2014/main" id="{7BA6A277-5873-4187-A892-E65490FB6614}"/>
+              </a:ext>
+            </a:extLst>
+          </p:cNvPr>
+          <p:cNvCxnSpPr>
+            <a:stCxn id="11" idx="2"/>
+            <a:endCxn id="16" idx="0"/>
+          </p:cNvCxnSpPr>
+          <p:nvPr/>
+        </p:nvCxnSpPr>
+        <p:spPr>
+          <a:xfrm>
+            <a:off x="10790348" y="5475396"/>
+            <a:ext cx="888576" cy="617667"/>
+          </a:xfrm>
+          <a:prstGeom prst="line">
+            <a:avLst/>
+          </a:prstGeom>
+        </p:spPr>
+        <p:style>
+          <a:lnRef idx="1">
+            <a:schemeClr val="accent1"/>
+          </a:lnRef>
+          <a:fillRef idx="0">
+            <a:schemeClr val="accent1"/>
+          </a:fillRef>
+          <a:effectRef idx="0">
+            <a:schemeClr val="accent1"/>
+          </a:effectRef>
+          <a:fontRef idx="minor">
+            <a:schemeClr val="tx1"/>
+          </a:fontRef>
+        </p:style>
+      </p:cxnSp>
+      <p:sp>
+        <p:nvSpPr>
+          <p:cNvPr id="19" name="文本框 18">
+            <a:extLst>
+              <a:ext uri="{FF2B5EF4-FFF2-40B4-BE49-F238E27FC236}">
+                <a16:creationId xmlns:a16="http://schemas.microsoft.com/office/drawing/2014/main" id="{1610DB31-2D7F-4D2A-A290-36BE59E898E1}"/>
+              </a:ext>
+            </a:extLst>
+          </p:cNvPr>
+          <p:cNvSpPr txBox="1"/>
+          <p:nvPr/>
+        </p:nvSpPr>
+        <p:spPr>
+          <a:xfrm>
+            <a:off x="7835730" y="6428283"/>
+            <a:ext cx="1083438" cy="461665"/>
+          </a:xfrm>
+          <a:prstGeom prst="rect">
+            <a:avLst/>
+          </a:prstGeom>
+          <a:noFill/>
+        </p:spPr>
+        <p:txBody>
+          <a:bodyPr wrap="none" rtlCol="0">
+            <a:spAutoFit/>
+          </a:bodyPr>
+          <a:lstStyle/>
+          <a:p>
+            <a:r>
+              <a:rPr lang="en-US" altLang="zh-CN" sz="1200" dirty="0"/>
+              <a:t>1:RangeTblRef</a:t>
+            </a:r>
+          </a:p>
+          <a:p>
+            <a:r>
+              <a:rPr lang="en-US" altLang="zh-CN" sz="1200" dirty="0"/>
+              <a:t>    </a:t>
+            </a:r>
+            <a:r>
+              <a:rPr lang="en-US" altLang="zh-CN" sz="1200" dirty="0" err="1"/>
+              <a:t>rtindex</a:t>
+            </a:r>
+            <a:r>
+              <a:rPr lang="en-US" altLang="zh-CN" sz="1200" dirty="0"/>
+              <a:t>=1</a:t>
+            </a:r>
+            <a:endParaRPr lang="zh-CN" altLang="en-US" sz="1200" dirty="0"/>
+          </a:p>
+        </p:txBody>
+      </p:sp>
+      <p:sp>
+        <p:nvSpPr>
+          <p:cNvPr id="20" name="文本框 19">
+            <a:extLst>
+              <a:ext uri="{FF2B5EF4-FFF2-40B4-BE49-F238E27FC236}">
+                <a16:creationId xmlns:a16="http://schemas.microsoft.com/office/drawing/2014/main" id="{777C5AD4-9657-45F0-BF23-8E91474810D5}"/>
+              </a:ext>
+            </a:extLst>
+          </p:cNvPr>
+          <p:cNvSpPr txBox="1"/>
+          <p:nvPr/>
+        </p:nvSpPr>
+        <p:spPr>
+          <a:xfrm>
+            <a:off x="9262944" y="6428283"/>
+            <a:ext cx="1083438" cy="461665"/>
+          </a:xfrm>
+          <a:prstGeom prst="rect">
+            <a:avLst/>
+          </a:prstGeom>
+          <a:noFill/>
+        </p:spPr>
+        <p:txBody>
+          <a:bodyPr wrap="none" rtlCol="0">
+            <a:spAutoFit/>
+          </a:bodyPr>
+          <a:lstStyle/>
+          <a:p>
+            <a:r>
+              <a:rPr lang="en-US" altLang="zh-CN" sz="1200" dirty="0"/>
+              <a:t>1:RangeTblRef</a:t>
+            </a:r>
+          </a:p>
+          <a:p>
+            <a:r>
+              <a:rPr lang="en-US" altLang="zh-CN" sz="1200" dirty="0"/>
+              <a:t>    </a:t>
+            </a:r>
+            <a:r>
+              <a:rPr lang="en-US" altLang="zh-CN" sz="1200" dirty="0" err="1"/>
+              <a:t>rtindex</a:t>
+            </a:r>
+            <a:r>
+              <a:rPr lang="en-US" altLang="zh-CN" sz="1200" dirty="0"/>
+              <a:t>=2</a:t>
+            </a:r>
+            <a:endParaRPr lang="zh-CN" altLang="en-US" sz="1200" dirty="0"/>
+          </a:p>
+        </p:txBody>
+      </p:sp>
+      <p:cxnSp>
+        <p:nvCxnSpPr>
+          <p:cNvPr id="21" name="直接连接符 20">
+            <a:extLst>
+              <a:ext uri="{FF2B5EF4-FFF2-40B4-BE49-F238E27FC236}">
+                <a16:creationId xmlns:a16="http://schemas.microsoft.com/office/drawing/2014/main" id="{68D3CA95-8D56-4CD5-9F24-3551A791BD4B}"/>
+              </a:ext>
+            </a:extLst>
+          </p:cNvPr>
+          <p:cNvCxnSpPr>
+            <a:stCxn id="15" idx="2"/>
+            <a:endCxn id="19" idx="0"/>
+          </p:cNvCxnSpPr>
+          <p:nvPr/>
+        </p:nvCxnSpPr>
+        <p:spPr>
+          <a:xfrm flipH="1">
+            <a:off x="8377449" y="6093063"/>
+            <a:ext cx="640240" cy="335220"/>
+          </a:xfrm>
+          <a:prstGeom prst="line">
+            <a:avLst/>
+          </a:prstGeom>
+        </p:spPr>
+        <p:style>
+          <a:lnRef idx="1">
+            <a:schemeClr val="accent1"/>
+          </a:lnRef>
+          <a:fillRef idx="0">
+            <a:schemeClr val="accent1"/>
+          </a:fillRef>
+          <a:effectRef idx="0">
+            <a:schemeClr val="accent1"/>
+          </a:effectRef>
+          <a:fontRef idx="minor">
+            <a:schemeClr val="tx1"/>
+          </a:fontRef>
+        </p:style>
+      </p:cxnSp>
+      <p:cxnSp>
+        <p:nvCxnSpPr>
+          <p:cNvPr id="22" name="直接连接符 21">
+            <a:extLst>
+              <a:ext uri="{FF2B5EF4-FFF2-40B4-BE49-F238E27FC236}">
+                <a16:creationId xmlns:a16="http://schemas.microsoft.com/office/drawing/2014/main" id="{DBD69C92-9C3D-421E-84EA-5906EB4B56A6}"/>
+              </a:ext>
+            </a:extLst>
+          </p:cNvPr>
+          <p:cNvCxnSpPr>
+            <a:stCxn id="15" idx="2"/>
+            <a:endCxn id="20" idx="0"/>
+          </p:cNvCxnSpPr>
+          <p:nvPr/>
+        </p:nvCxnSpPr>
+        <p:spPr>
+          <a:xfrm>
+            <a:off x="9017689" y="6093063"/>
+            <a:ext cx="786974" cy="335220"/>
+          </a:xfrm>
+          <a:prstGeom prst="line">
+            <a:avLst/>
+          </a:prstGeom>
+        </p:spPr>
+        <p:style>
+          <a:lnRef idx="1">
+            <a:schemeClr val="accent1"/>
+          </a:lnRef>
+          <a:fillRef idx="0">
+            <a:schemeClr val="accent1"/>
+          </a:fillRef>
+          <a:effectRef idx="0">
+            <a:schemeClr val="accent1"/>
+          </a:effectRef>
+          <a:fontRef idx="minor">
+            <a:schemeClr val="tx1"/>
+          </a:fontRef>
+        </p:style>
+      </p:cxnSp>
+      <p:sp>
+        <p:nvSpPr>
+          <p:cNvPr id="23" name="文本框 22">
+            <a:extLst>
+              <a:ext uri="{FF2B5EF4-FFF2-40B4-BE49-F238E27FC236}">
+                <a16:creationId xmlns:a16="http://schemas.microsoft.com/office/drawing/2014/main" id="{9CEAFDB7-C248-4457-A9FD-C879A235F2F3}"/>
+              </a:ext>
+            </a:extLst>
+          </p:cNvPr>
+          <p:cNvSpPr txBox="1"/>
+          <p:nvPr/>
+        </p:nvSpPr>
+        <p:spPr>
+          <a:xfrm>
+            <a:off x="10790348" y="6875670"/>
+            <a:ext cx="955711" cy="461665"/>
+          </a:xfrm>
+          <a:prstGeom prst="rect">
+            <a:avLst/>
+          </a:prstGeom>
+          <a:noFill/>
+        </p:spPr>
+        <p:txBody>
+          <a:bodyPr wrap="none" rtlCol="0">
+            <a:spAutoFit/>
+          </a:bodyPr>
+          <a:lstStyle/>
+          <a:p>
+            <a:r>
+              <a:rPr lang="en-US" altLang="zh-CN" sz="1200" dirty="0" err="1"/>
+              <a:t>opno</a:t>
+            </a:r>
+            <a:r>
+              <a:rPr lang="en-US" altLang="zh-CN" sz="1200" dirty="0"/>
+              <a:t>/</a:t>
+            </a:r>
+            <a:r>
+              <a:rPr lang="en-US" altLang="zh-CN" sz="1200" dirty="0" err="1"/>
+              <a:t>funcid</a:t>
+            </a:r>
+            <a:endParaRPr lang="en-US" altLang="zh-CN" sz="1200" dirty="0"/>
+          </a:p>
+          <a:p>
+            <a:r>
+              <a:rPr lang="en-US" altLang="zh-CN" sz="1200" dirty="0"/>
+              <a:t>    98/67</a:t>
+            </a:r>
+            <a:endParaRPr lang="zh-CN" altLang="en-US" sz="1200" dirty="0"/>
+          </a:p>
+        </p:txBody>
+      </p:sp>
+      <p:sp>
+        <p:nvSpPr>
+          <p:cNvPr id="24" name="文本框 23">
+            <a:extLst>
+              <a:ext uri="{FF2B5EF4-FFF2-40B4-BE49-F238E27FC236}">
+                <a16:creationId xmlns:a16="http://schemas.microsoft.com/office/drawing/2014/main" id="{392A90A6-50E9-4C7E-B23C-45DC8A47AF82}"/>
+              </a:ext>
+            </a:extLst>
+          </p:cNvPr>
+          <p:cNvSpPr txBox="1"/>
+          <p:nvPr/>
+        </p:nvSpPr>
+        <p:spPr>
+          <a:xfrm>
+            <a:off x="12217562" y="6875670"/>
+            <a:ext cx="442237" cy="276999"/>
+          </a:xfrm>
+          <a:prstGeom prst="rect">
+            <a:avLst/>
+          </a:prstGeom>
+          <a:noFill/>
+        </p:spPr>
+        <p:txBody>
+          <a:bodyPr wrap="none" rtlCol="0">
+            <a:spAutoFit/>
+          </a:bodyPr>
+          <a:lstStyle/>
+          <a:p>
+            <a:r>
+              <a:rPr lang="en-US" altLang="zh-CN" sz="1200" dirty="0" err="1"/>
+              <a:t>args</a:t>
+            </a:r>
+            <a:endParaRPr lang="zh-CN" altLang="en-US" sz="1200" dirty="0"/>
+          </a:p>
+        </p:txBody>
+      </p:sp>
+      <p:cxnSp>
+        <p:nvCxnSpPr>
+          <p:cNvPr id="25" name="直接连接符 24">
+            <a:extLst>
+              <a:ext uri="{FF2B5EF4-FFF2-40B4-BE49-F238E27FC236}">
+                <a16:creationId xmlns:a16="http://schemas.microsoft.com/office/drawing/2014/main" id="{E685DEDF-B462-419C-89FC-92EDDB34B9B1}"/>
+              </a:ext>
+            </a:extLst>
+          </p:cNvPr>
+          <p:cNvCxnSpPr>
+            <a:stCxn id="16" idx="2"/>
+            <a:endCxn id="23" idx="0"/>
+          </p:cNvCxnSpPr>
+          <p:nvPr/>
+        </p:nvCxnSpPr>
+        <p:spPr>
+          <a:xfrm flipH="1">
+            <a:off x="11268204" y="6370062"/>
+            <a:ext cx="410720" cy="505608"/>
+          </a:xfrm>
+          <a:prstGeom prst="line">
+            <a:avLst/>
+          </a:prstGeom>
+        </p:spPr>
+        <p:style>
+          <a:lnRef idx="1">
+            <a:schemeClr val="accent1"/>
+          </a:lnRef>
+          <a:fillRef idx="0">
+            <a:schemeClr val="accent1"/>
+          </a:fillRef>
+          <a:effectRef idx="0">
+            <a:schemeClr val="accent1"/>
+          </a:effectRef>
+          <a:fontRef idx="minor">
+            <a:schemeClr val="tx1"/>
+          </a:fontRef>
+        </p:style>
+      </p:cxnSp>
+      <p:cxnSp>
+        <p:nvCxnSpPr>
+          <p:cNvPr id="26" name="直接连接符 25">
+            <a:extLst>
+              <a:ext uri="{FF2B5EF4-FFF2-40B4-BE49-F238E27FC236}">
+                <a16:creationId xmlns:a16="http://schemas.microsoft.com/office/drawing/2014/main" id="{EA5AED3A-D6B9-4CC8-9913-98BEAD90C91D}"/>
+              </a:ext>
+            </a:extLst>
+          </p:cNvPr>
+          <p:cNvCxnSpPr>
+            <a:stCxn id="16" idx="2"/>
+            <a:endCxn id="24" idx="0"/>
+          </p:cNvCxnSpPr>
+          <p:nvPr/>
+        </p:nvCxnSpPr>
+        <p:spPr>
+          <a:xfrm>
+            <a:off x="11678924" y="6370062"/>
+            <a:ext cx="759757" cy="505608"/>
+          </a:xfrm>
+          <a:prstGeom prst="line">
+            <a:avLst/>
+          </a:prstGeom>
+        </p:spPr>
+        <p:style>
+          <a:lnRef idx="1">
+            <a:schemeClr val="accent1"/>
+          </a:lnRef>
+          <a:fillRef idx="0">
+            <a:schemeClr val="accent1"/>
+          </a:fillRef>
+          <a:effectRef idx="0">
+            <a:schemeClr val="accent1"/>
+          </a:effectRef>
+          <a:fontRef idx="minor">
+            <a:schemeClr val="tx1"/>
+          </a:fontRef>
+        </p:style>
+      </p:cxnSp>
+      <p:sp>
+        <p:nvSpPr>
+          <p:cNvPr id="27" name="文本框 26">
+            <a:extLst>
+              <a:ext uri="{FF2B5EF4-FFF2-40B4-BE49-F238E27FC236}">
+                <a16:creationId xmlns:a16="http://schemas.microsoft.com/office/drawing/2014/main" id="{AD5AF027-77EB-43CB-ACDE-D8551297442C}"/>
+              </a:ext>
+            </a:extLst>
+          </p:cNvPr>
+          <p:cNvSpPr txBox="1"/>
+          <p:nvPr/>
+        </p:nvSpPr>
+        <p:spPr>
+          <a:xfrm>
+            <a:off x="11479028" y="7759295"/>
+            <a:ext cx="1058238" cy="276999"/>
+          </a:xfrm>
+          <a:prstGeom prst="rect">
+            <a:avLst/>
+          </a:prstGeom>
+          <a:noFill/>
+        </p:spPr>
+        <p:txBody>
+          <a:bodyPr wrap="none" rtlCol="0">
+            <a:spAutoFit/>
+          </a:bodyPr>
+          <a:lstStyle/>
+          <a:p>
+            <a:r>
+              <a:rPr lang="en-US" altLang="zh-CN" sz="1200" dirty="0"/>
+              <a:t>1:RelabelType</a:t>
+            </a:r>
+            <a:endParaRPr lang="zh-CN" altLang="en-US" sz="1200" dirty="0"/>
+          </a:p>
+        </p:txBody>
+      </p:sp>
+      <p:sp>
+        <p:nvSpPr>
+          <p:cNvPr id="28" name="文本框 27">
+            <a:extLst>
+              <a:ext uri="{FF2B5EF4-FFF2-40B4-BE49-F238E27FC236}">
+                <a16:creationId xmlns:a16="http://schemas.microsoft.com/office/drawing/2014/main" id="{41DF9351-A630-4B95-8277-22535CA11539}"/>
+              </a:ext>
+            </a:extLst>
+          </p:cNvPr>
+          <p:cNvSpPr txBox="1"/>
+          <p:nvPr/>
+        </p:nvSpPr>
+        <p:spPr>
+          <a:xfrm>
+            <a:off x="12841045" y="7759296"/>
+            <a:ext cx="1058238" cy="276999"/>
+          </a:xfrm>
+          <a:prstGeom prst="rect">
+            <a:avLst/>
+          </a:prstGeom>
+          <a:noFill/>
+        </p:spPr>
+        <p:txBody>
+          <a:bodyPr wrap="none" rtlCol="0">
+            <a:spAutoFit/>
+          </a:bodyPr>
+          <a:lstStyle/>
+          <a:p>
+            <a:r>
+              <a:rPr lang="en-US" altLang="zh-CN" sz="1200" dirty="0"/>
+              <a:t>2:RelabelType</a:t>
+            </a:r>
+            <a:endParaRPr lang="zh-CN" altLang="en-US" sz="1200" dirty="0"/>
+          </a:p>
+        </p:txBody>
+      </p:sp>
+      <p:cxnSp>
+        <p:nvCxnSpPr>
+          <p:cNvPr id="29" name="直接连接符 28">
+            <a:extLst>
+              <a:ext uri="{FF2B5EF4-FFF2-40B4-BE49-F238E27FC236}">
+                <a16:creationId xmlns:a16="http://schemas.microsoft.com/office/drawing/2014/main" id="{929EDE9A-E01E-4B9A-958C-A0386839C1B4}"/>
+              </a:ext>
+            </a:extLst>
+          </p:cNvPr>
+          <p:cNvCxnSpPr>
+            <a:cxnSpLocks/>
+            <a:stCxn id="24" idx="2"/>
+            <a:endCxn id="27" idx="0"/>
+          </p:cNvCxnSpPr>
+          <p:nvPr/>
+        </p:nvCxnSpPr>
+        <p:spPr>
+          <a:xfrm flipH="1">
+            <a:off x="12008147" y="7152669"/>
+            <a:ext cx="430534" cy="606626"/>
+          </a:xfrm>
+          <a:prstGeom prst="line">
+            <a:avLst/>
+          </a:prstGeom>
+        </p:spPr>
+        <p:style>
+          <a:lnRef idx="1">
+            <a:schemeClr val="accent1"/>
+          </a:lnRef>
+          <a:fillRef idx="0">
+            <a:schemeClr val="accent1"/>
+          </a:fillRef>
+          <a:effectRef idx="0">
+            <a:schemeClr val="accent1"/>
+          </a:effectRef>
+          <a:fontRef idx="minor">
+            <a:schemeClr val="tx1"/>
+          </a:fontRef>
+        </p:style>
+      </p:cxnSp>
+      <p:cxnSp>
+        <p:nvCxnSpPr>
+          <p:cNvPr id="30" name="直接连接符 29">
+            <a:extLst>
+              <a:ext uri="{FF2B5EF4-FFF2-40B4-BE49-F238E27FC236}">
+                <a16:creationId xmlns:a16="http://schemas.microsoft.com/office/drawing/2014/main" id="{74FACF0F-183A-4B40-8CFF-C58E28EF5D5F}"/>
+              </a:ext>
+            </a:extLst>
+          </p:cNvPr>
+          <p:cNvCxnSpPr>
+            <a:stCxn id="24" idx="2"/>
+            <a:endCxn id="28" idx="0"/>
+          </p:cNvCxnSpPr>
+          <p:nvPr/>
+        </p:nvCxnSpPr>
+        <p:spPr>
+          <a:xfrm>
+            <a:off x="12438681" y="7152669"/>
+            <a:ext cx="931483" cy="606627"/>
+          </a:xfrm>
+          <a:prstGeom prst="line">
+            <a:avLst/>
+          </a:prstGeom>
+        </p:spPr>
+        <p:style>
+          <a:lnRef idx="1">
+            <a:schemeClr val="accent1"/>
+          </a:lnRef>
+          <a:fillRef idx="0">
+            <a:schemeClr val="accent1"/>
+          </a:fillRef>
+          <a:effectRef idx="0">
+            <a:schemeClr val="accent1"/>
+          </a:effectRef>
+          <a:fontRef idx="minor">
+            <a:schemeClr val="tx1"/>
+          </a:fontRef>
+        </p:style>
+      </p:cxnSp>
+      <p:sp>
+        <p:nvSpPr>
+          <p:cNvPr id="31" name="文本框 30">
+            <a:extLst>
+              <a:ext uri="{FF2B5EF4-FFF2-40B4-BE49-F238E27FC236}">
+                <a16:creationId xmlns:a16="http://schemas.microsoft.com/office/drawing/2014/main" id="{FFC178B9-A0D5-48F4-BB76-C9DF826DBA31}"/>
+              </a:ext>
+            </a:extLst>
+          </p:cNvPr>
+          <p:cNvSpPr txBox="1"/>
+          <p:nvPr/>
+        </p:nvSpPr>
+        <p:spPr>
+          <a:xfrm>
+            <a:off x="11455177" y="8365921"/>
+            <a:ext cx="675441" cy="276999"/>
+          </a:xfrm>
+          <a:prstGeom prst="rect">
+            <a:avLst/>
+          </a:prstGeom>
+          <a:noFill/>
+        </p:spPr>
+        <p:txBody>
+          <a:bodyPr wrap="none" rtlCol="0">
+            <a:spAutoFit/>
+          </a:bodyPr>
+          <a:lstStyle/>
+          <a:p>
+            <a:r>
+              <a:rPr lang="en-US" altLang="zh-CN" sz="1200" dirty="0" err="1"/>
+              <a:t>arg:VAR</a:t>
+            </a:r>
+            <a:endParaRPr lang="zh-CN" altLang="en-US" sz="1200" dirty="0"/>
+          </a:p>
+        </p:txBody>
+      </p:sp>
+      <p:sp>
+        <p:nvSpPr>
+          <p:cNvPr id="32" name="文本框 31">
+            <a:extLst>
+              <a:ext uri="{FF2B5EF4-FFF2-40B4-BE49-F238E27FC236}">
+                <a16:creationId xmlns:a16="http://schemas.microsoft.com/office/drawing/2014/main" id="{7653497C-2AF5-4D31-8B80-671A5EE12BA1}"/>
+              </a:ext>
+            </a:extLst>
+          </p:cNvPr>
+          <p:cNvSpPr txBox="1"/>
+          <p:nvPr/>
+        </p:nvSpPr>
+        <p:spPr>
+          <a:xfrm>
+            <a:off x="13080583" y="8378418"/>
+            <a:ext cx="675441" cy="276999"/>
+          </a:xfrm>
+          <a:prstGeom prst="rect">
+            <a:avLst/>
+          </a:prstGeom>
+          <a:noFill/>
+        </p:spPr>
+        <p:txBody>
+          <a:bodyPr wrap="none" rtlCol="0">
+            <a:spAutoFit/>
+          </a:bodyPr>
+          <a:lstStyle/>
+          <a:p>
+            <a:r>
+              <a:rPr lang="en-US" altLang="zh-CN" sz="1200" dirty="0" err="1"/>
+              <a:t>arg:VAR</a:t>
+            </a:r>
+            <a:endParaRPr lang="zh-CN" altLang="en-US" sz="1200" dirty="0"/>
+          </a:p>
+        </p:txBody>
+      </p:sp>
+      <p:sp>
+        <p:nvSpPr>
+          <p:cNvPr id="33" name="文本框 32">
+            <a:extLst>
+              <a:ext uri="{FF2B5EF4-FFF2-40B4-BE49-F238E27FC236}">
+                <a16:creationId xmlns:a16="http://schemas.microsoft.com/office/drawing/2014/main" id="{5453A51E-F019-4CE3-922B-6AF3D81F5FC9}"/>
+              </a:ext>
+            </a:extLst>
+          </p:cNvPr>
+          <p:cNvSpPr txBox="1"/>
+          <p:nvPr/>
+        </p:nvSpPr>
+        <p:spPr>
+          <a:xfrm>
+            <a:off x="11153395" y="9064880"/>
+            <a:ext cx="1279004" cy="461665"/>
+          </a:xfrm>
+          <a:prstGeom prst="rect">
+            <a:avLst/>
+          </a:prstGeom>
+          <a:noFill/>
+        </p:spPr>
+        <p:txBody>
+          <a:bodyPr wrap="none" rtlCol="0">
+            <a:spAutoFit/>
+          </a:bodyPr>
+          <a:lstStyle/>
+          <a:p>
+            <a:r>
+              <a:rPr lang="en-US" altLang="zh-CN" sz="1200" dirty="0" err="1"/>
+              <a:t>varno</a:t>
+            </a:r>
+            <a:r>
+              <a:rPr lang="en-US" altLang="zh-CN" sz="1200" dirty="0"/>
+              <a:t>/</a:t>
+            </a:r>
+            <a:r>
+              <a:rPr lang="en-US" altLang="zh-CN" sz="1200" dirty="0" err="1"/>
+              <a:t>attno</a:t>
+            </a:r>
+            <a:r>
+              <a:rPr lang="en-US" altLang="zh-CN" sz="1200" dirty="0"/>
+              <a:t>/type</a:t>
+            </a:r>
+          </a:p>
+          <a:p>
+            <a:r>
+              <a:rPr lang="en-US" altLang="zh-CN" sz="1200" dirty="0"/>
+              <a:t>     1/2/1043</a:t>
+            </a:r>
+            <a:endParaRPr lang="zh-CN" altLang="en-US" sz="1200" dirty="0"/>
+          </a:p>
+        </p:txBody>
+      </p:sp>
+      <p:sp>
+        <p:nvSpPr>
+          <p:cNvPr id="34" name="文本框 33">
+            <a:extLst>
+              <a:ext uri="{FF2B5EF4-FFF2-40B4-BE49-F238E27FC236}">
+                <a16:creationId xmlns:a16="http://schemas.microsoft.com/office/drawing/2014/main" id="{D81F01E4-EB36-41E5-ABC0-4B22E149C46E}"/>
+              </a:ext>
+            </a:extLst>
+          </p:cNvPr>
+          <p:cNvSpPr txBox="1"/>
+          <p:nvPr/>
+        </p:nvSpPr>
+        <p:spPr>
+          <a:xfrm>
+            <a:off x="12871544" y="9084554"/>
+            <a:ext cx="1267719" cy="461665"/>
+          </a:xfrm>
+          <a:prstGeom prst="rect">
+            <a:avLst/>
+          </a:prstGeom>
+          <a:noFill/>
+        </p:spPr>
+        <p:txBody>
+          <a:bodyPr wrap="none" rtlCol="0">
+            <a:spAutoFit/>
+          </a:bodyPr>
+          <a:lstStyle/>
+          <a:p>
+            <a:r>
+              <a:rPr lang="en-US" altLang="zh-CN" sz="1200" dirty="0" err="1"/>
+              <a:t>varno</a:t>
+            </a:r>
+            <a:r>
+              <a:rPr lang="en-US" altLang="zh-CN" sz="1200" dirty="0"/>
+              <a:t>/</a:t>
+            </a:r>
+            <a:r>
+              <a:rPr lang="en-US" altLang="zh-CN" sz="1200" dirty="0" err="1"/>
+              <a:t>attno</a:t>
+            </a:r>
+            <a:r>
+              <a:rPr lang="en-US" altLang="zh-CN" sz="1200" dirty="0"/>
+              <a:t>/type</a:t>
+            </a:r>
+          </a:p>
+          <a:p>
+            <a:r>
+              <a:rPr lang="en-US" altLang="zh-CN" sz="1200" dirty="0"/>
+              <a:t>     2/1/1043</a:t>
+            </a:r>
+            <a:endParaRPr lang="zh-CN" altLang="en-US" sz="1200" dirty="0"/>
+          </a:p>
+        </p:txBody>
+      </p:sp>
+      <p:cxnSp>
+        <p:nvCxnSpPr>
+          <p:cNvPr id="35" name="直接连接符 34">
+            <a:extLst>
+              <a:ext uri="{FF2B5EF4-FFF2-40B4-BE49-F238E27FC236}">
+                <a16:creationId xmlns:a16="http://schemas.microsoft.com/office/drawing/2014/main" id="{3A80CF02-F14F-44AE-B748-DE5BF0D3703C}"/>
+              </a:ext>
+            </a:extLst>
+          </p:cNvPr>
+          <p:cNvCxnSpPr>
+            <a:stCxn id="27" idx="2"/>
+            <a:endCxn id="31" idx="0"/>
+          </p:cNvCxnSpPr>
+          <p:nvPr/>
+        </p:nvCxnSpPr>
+        <p:spPr>
+          <a:xfrm flipH="1">
+            <a:off x="11792898" y="8036294"/>
+            <a:ext cx="215249" cy="329627"/>
+          </a:xfrm>
+          <a:prstGeom prst="line">
+            <a:avLst/>
+          </a:prstGeom>
+        </p:spPr>
+        <p:style>
+          <a:lnRef idx="1">
+            <a:schemeClr val="accent1"/>
+          </a:lnRef>
+          <a:fillRef idx="0">
+            <a:schemeClr val="accent1"/>
+          </a:fillRef>
+          <a:effectRef idx="0">
+            <a:schemeClr val="accent1"/>
+          </a:effectRef>
+          <a:fontRef idx="minor">
+            <a:schemeClr val="tx1"/>
+          </a:fontRef>
+        </p:style>
+      </p:cxnSp>
+      <p:cxnSp>
+        <p:nvCxnSpPr>
+          <p:cNvPr id="36" name="直接连接符 35">
+            <a:extLst>
+              <a:ext uri="{FF2B5EF4-FFF2-40B4-BE49-F238E27FC236}">
+                <a16:creationId xmlns:a16="http://schemas.microsoft.com/office/drawing/2014/main" id="{17C1716A-C215-4953-AB70-3823AC950BCF}"/>
+              </a:ext>
+            </a:extLst>
+          </p:cNvPr>
+          <p:cNvCxnSpPr>
+            <a:stCxn id="28" idx="2"/>
+            <a:endCxn id="32" idx="0"/>
+          </p:cNvCxnSpPr>
+          <p:nvPr/>
+        </p:nvCxnSpPr>
+        <p:spPr>
+          <a:xfrm>
+            <a:off x="13370164" y="8036295"/>
+            <a:ext cx="48140" cy="342123"/>
+          </a:xfrm>
+          <a:prstGeom prst="line">
+            <a:avLst/>
+          </a:prstGeom>
+        </p:spPr>
+        <p:style>
+          <a:lnRef idx="1">
+            <a:schemeClr val="accent1"/>
+          </a:lnRef>
+          <a:fillRef idx="0">
+            <a:schemeClr val="accent1"/>
+          </a:fillRef>
+          <a:effectRef idx="0">
+            <a:schemeClr val="accent1"/>
+          </a:effectRef>
+          <a:fontRef idx="minor">
+            <a:schemeClr val="tx1"/>
+          </a:fontRef>
+        </p:style>
+      </p:cxnSp>
+      <p:cxnSp>
+        <p:nvCxnSpPr>
+          <p:cNvPr id="37" name="直接连接符 36">
+            <a:extLst>
+              <a:ext uri="{FF2B5EF4-FFF2-40B4-BE49-F238E27FC236}">
+                <a16:creationId xmlns:a16="http://schemas.microsoft.com/office/drawing/2014/main" id="{2C4EA56D-3CCA-461B-AC29-35F8C606D113}"/>
+              </a:ext>
+            </a:extLst>
+          </p:cNvPr>
+          <p:cNvCxnSpPr>
+            <a:stCxn id="31" idx="2"/>
+            <a:endCxn id="33" idx="0"/>
+          </p:cNvCxnSpPr>
+          <p:nvPr/>
+        </p:nvCxnSpPr>
+        <p:spPr>
+          <a:xfrm flipH="1">
+            <a:off x="11792897" y="8642920"/>
+            <a:ext cx="1" cy="421960"/>
+          </a:xfrm>
+          <a:prstGeom prst="line">
+            <a:avLst/>
+          </a:prstGeom>
+        </p:spPr>
+        <p:style>
+          <a:lnRef idx="1">
+            <a:schemeClr val="accent1"/>
+          </a:lnRef>
+          <a:fillRef idx="0">
+            <a:schemeClr val="accent1"/>
+          </a:fillRef>
+          <a:effectRef idx="0">
+            <a:schemeClr val="accent1"/>
+          </a:effectRef>
+          <a:fontRef idx="minor">
+            <a:schemeClr val="tx1"/>
+          </a:fontRef>
+        </p:style>
+      </p:cxnSp>
+      <p:cxnSp>
+        <p:nvCxnSpPr>
+          <p:cNvPr id="38" name="直接连接符 37">
+            <a:extLst>
+              <a:ext uri="{FF2B5EF4-FFF2-40B4-BE49-F238E27FC236}">
+                <a16:creationId xmlns:a16="http://schemas.microsoft.com/office/drawing/2014/main" id="{BB039BEA-43B8-4894-8E63-D8290667FA46}"/>
+              </a:ext>
+            </a:extLst>
+          </p:cNvPr>
+          <p:cNvCxnSpPr>
+            <a:stCxn id="32" idx="2"/>
+            <a:endCxn id="34" idx="0"/>
+          </p:cNvCxnSpPr>
+          <p:nvPr/>
+        </p:nvCxnSpPr>
+        <p:spPr>
+          <a:xfrm>
+            <a:off x="13418304" y="8655417"/>
+            <a:ext cx="87100" cy="429137"/>
+          </a:xfrm>
+          <a:prstGeom prst="line">
+            <a:avLst/>
+          </a:prstGeom>
+        </p:spPr>
+        <p:style>
+          <a:lnRef idx="1">
+            <a:schemeClr val="accent1"/>
+          </a:lnRef>
+          <a:fillRef idx="0">
+            <a:schemeClr val="accent1"/>
+          </a:fillRef>
+          <a:effectRef idx="0">
+            <a:schemeClr val="accent1"/>
+          </a:effectRef>
+          <a:fontRef idx="minor">
+            <a:schemeClr val="tx1"/>
+          </a:fontRef>
+        </p:style>
+      </p:cxnSp>
+      <p:sp>
+        <p:nvSpPr>
+          <p:cNvPr id="39" name="文本框 38">
+            <a:extLst>
+              <a:ext uri="{FF2B5EF4-FFF2-40B4-BE49-F238E27FC236}">
+                <a16:creationId xmlns:a16="http://schemas.microsoft.com/office/drawing/2014/main" id="{6F0A1721-02B4-4590-9B3D-29DA8315980D}"/>
+              </a:ext>
+            </a:extLst>
+          </p:cNvPr>
+          <p:cNvSpPr txBox="1"/>
+          <p:nvPr/>
+        </p:nvSpPr>
+        <p:spPr>
+          <a:xfrm>
+            <a:off x="5965218" y="6566764"/>
+            <a:ext cx="1191288" cy="276999"/>
+          </a:xfrm>
+          <a:prstGeom prst="rect">
+            <a:avLst/>
+          </a:prstGeom>
+          <a:noFill/>
+        </p:spPr>
+        <p:txBody>
+          <a:bodyPr wrap="none" rtlCol="0">
+            <a:spAutoFit/>
+          </a:bodyPr>
+          <a:lstStyle/>
+          <a:p>
+            <a:r>
+              <a:rPr lang="en-US" altLang="zh-CN" sz="1200" dirty="0" err="1"/>
+              <a:t>subquery:Query</a:t>
+            </a:r>
+            <a:endParaRPr lang="zh-CN" altLang="en-US" sz="1200" dirty="0"/>
+          </a:p>
+        </p:txBody>
+      </p:sp>
+      <p:sp>
+        <p:nvSpPr>
+          <p:cNvPr id="40" name="文本框 39">
+            <a:extLst>
+              <a:ext uri="{FF2B5EF4-FFF2-40B4-BE49-F238E27FC236}">
+                <a16:creationId xmlns:a16="http://schemas.microsoft.com/office/drawing/2014/main" id="{C0074D87-C161-477E-9594-6CA003E778D7}"/>
+              </a:ext>
+            </a:extLst>
+          </p:cNvPr>
+          <p:cNvSpPr txBox="1"/>
+          <p:nvPr/>
+        </p:nvSpPr>
+        <p:spPr>
+          <a:xfrm>
+            <a:off x="5077523" y="8489692"/>
+            <a:ext cx="777777" cy="461665"/>
+          </a:xfrm>
+          <a:prstGeom prst="rect">
+            <a:avLst/>
+          </a:prstGeom>
+          <a:noFill/>
+        </p:spPr>
+        <p:txBody>
+          <a:bodyPr wrap="none" rtlCol="0">
+            <a:spAutoFit/>
+          </a:bodyPr>
+          <a:lstStyle/>
+          <a:p>
+            <a:r>
+              <a:rPr lang="en-US" altLang="zh-CN" sz="1200" dirty="0" err="1"/>
+              <a:t>rtable:list</a:t>
+            </a:r>
+            <a:endParaRPr lang="en-US" altLang="zh-CN" sz="1200" dirty="0"/>
+          </a:p>
+          <a:p>
+            <a:r>
+              <a:rPr lang="en-US" altLang="zh-CN" sz="1200" dirty="0"/>
+              <a:t>1 items</a:t>
+            </a:r>
+            <a:endParaRPr lang="zh-CN" altLang="en-US" sz="1200" dirty="0"/>
+          </a:p>
+        </p:txBody>
+      </p:sp>
+      <p:cxnSp>
+        <p:nvCxnSpPr>
+          <p:cNvPr id="41" name="直接连接符 40">
+            <a:extLst>
+              <a:ext uri="{FF2B5EF4-FFF2-40B4-BE49-F238E27FC236}">
+                <a16:creationId xmlns:a16="http://schemas.microsoft.com/office/drawing/2014/main" id="{CB14C835-4E1B-4964-8647-6760E89EFAF6}"/>
+              </a:ext>
+            </a:extLst>
+          </p:cNvPr>
+          <p:cNvCxnSpPr>
+            <a:stCxn id="39" idx="2"/>
+            <a:endCxn id="40" idx="0"/>
+          </p:cNvCxnSpPr>
+          <p:nvPr/>
+        </p:nvCxnSpPr>
+        <p:spPr>
+          <a:xfrm flipH="1">
+            <a:off x="5466412" y="6843763"/>
+            <a:ext cx="1094450" cy="1645929"/>
+          </a:xfrm>
+          <a:prstGeom prst="line">
+            <a:avLst/>
+          </a:prstGeom>
+        </p:spPr>
+        <p:style>
+          <a:lnRef idx="1">
+            <a:schemeClr val="accent1"/>
+          </a:lnRef>
+          <a:fillRef idx="0">
+            <a:schemeClr val="accent1"/>
+          </a:fillRef>
+          <a:effectRef idx="0">
+            <a:schemeClr val="accent1"/>
+          </a:effectRef>
+          <a:fontRef idx="minor">
+            <a:schemeClr val="tx1"/>
+          </a:fontRef>
+        </p:style>
+      </p:cxnSp>
+      <p:sp>
+        <p:nvSpPr>
+          <p:cNvPr id="42" name="文本框 41">
+            <a:extLst>
+              <a:ext uri="{FF2B5EF4-FFF2-40B4-BE49-F238E27FC236}">
+                <a16:creationId xmlns:a16="http://schemas.microsoft.com/office/drawing/2014/main" id="{33BC12D9-AEF4-4B44-81BA-DA046CD7D2F9}"/>
+              </a:ext>
+            </a:extLst>
+          </p:cNvPr>
+          <p:cNvSpPr txBox="1"/>
+          <p:nvPr/>
+        </p:nvSpPr>
+        <p:spPr>
+          <a:xfrm>
+            <a:off x="4420852" y="9579957"/>
+            <a:ext cx="1110497" cy="646331"/>
+          </a:xfrm>
+          <a:prstGeom prst="rect">
+            <a:avLst/>
+          </a:prstGeom>
+          <a:noFill/>
+        </p:spPr>
+        <p:txBody>
+          <a:bodyPr wrap="none" rtlCol="0">
+            <a:spAutoFit/>
+          </a:bodyPr>
+          <a:lstStyle/>
+          <a:p>
+            <a:r>
+              <a:rPr lang="en-US" altLang="zh-CN" sz="1200" dirty="0"/>
+              <a:t>      1:RTE</a:t>
+            </a:r>
+          </a:p>
+          <a:p>
+            <a:r>
+              <a:rPr lang="en-US" altLang="zh-CN" sz="1200" dirty="0"/>
+              <a:t>RTE_RELATION</a:t>
+            </a:r>
+          </a:p>
+          <a:p>
+            <a:r>
+              <a:rPr lang="en-US" altLang="zh-CN" sz="1200" dirty="0"/>
+              <a:t>‘s’/16397/’r’</a:t>
+            </a:r>
+            <a:endParaRPr lang="zh-CN" altLang="en-US" sz="1200" dirty="0"/>
+          </a:p>
+        </p:txBody>
+      </p:sp>
+      <p:cxnSp>
+        <p:nvCxnSpPr>
+          <p:cNvPr id="43" name="直接连接符 42">
+            <a:extLst>
+              <a:ext uri="{FF2B5EF4-FFF2-40B4-BE49-F238E27FC236}">
+                <a16:creationId xmlns:a16="http://schemas.microsoft.com/office/drawing/2014/main" id="{71990497-F5CB-4CC6-BB84-BC98AF8002F8}"/>
+              </a:ext>
+            </a:extLst>
+          </p:cNvPr>
+          <p:cNvCxnSpPr>
+            <a:stCxn id="40" idx="2"/>
+            <a:endCxn id="42" idx="0"/>
+          </p:cNvCxnSpPr>
+          <p:nvPr/>
+        </p:nvCxnSpPr>
+        <p:spPr>
+          <a:xfrm flipH="1">
+            <a:off x="4976101" y="8951357"/>
+            <a:ext cx="490311" cy="628600"/>
+          </a:xfrm>
+          <a:prstGeom prst="line">
+            <a:avLst/>
+          </a:prstGeom>
+        </p:spPr>
+        <p:style>
+          <a:lnRef idx="1">
+            <a:schemeClr val="accent1"/>
+          </a:lnRef>
+          <a:fillRef idx="0">
+            <a:schemeClr val="accent1"/>
+          </a:fillRef>
+          <a:effectRef idx="0">
+            <a:schemeClr val="accent1"/>
+          </a:effectRef>
+          <a:fontRef idx="minor">
+            <a:schemeClr val="tx1"/>
+          </a:fontRef>
+        </p:style>
+      </p:cxnSp>
+      <p:sp>
+        <p:nvSpPr>
+          <p:cNvPr id="44" name="文本框 43">
+            <a:extLst>
+              <a:ext uri="{FF2B5EF4-FFF2-40B4-BE49-F238E27FC236}">
+                <a16:creationId xmlns:a16="http://schemas.microsoft.com/office/drawing/2014/main" id="{391699AE-1B80-4904-A682-33FD5B6FF0E4}"/>
+              </a:ext>
+            </a:extLst>
+          </p:cNvPr>
+          <p:cNvSpPr txBox="1"/>
+          <p:nvPr/>
+        </p:nvSpPr>
+        <p:spPr>
+          <a:xfrm>
+            <a:off x="6947966" y="8182493"/>
+            <a:ext cx="1329659" cy="276999"/>
+          </a:xfrm>
+          <a:prstGeom prst="rect">
+            <a:avLst/>
+          </a:prstGeom>
+          <a:noFill/>
+        </p:spPr>
+        <p:txBody>
+          <a:bodyPr wrap="none" rtlCol="0">
+            <a:spAutoFit/>
+          </a:bodyPr>
+          <a:lstStyle/>
+          <a:p>
+            <a:r>
+              <a:rPr lang="en-US" altLang="zh-CN" sz="1200" dirty="0" err="1"/>
+              <a:t>jointree:FromExpr</a:t>
+            </a:r>
+            <a:endParaRPr lang="zh-CN" altLang="en-US" sz="1200" dirty="0"/>
+          </a:p>
+        </p:txBody>
+      </p:sp>
+      <p:cxnSp>
+        <p:nvCxnSpPr>
+          <p:cNvPr id="45" name="直接连接符 44">
+            <a:extLst>
+              <a:ext uri="{FF2B5EF4-FFF2-40B4-BE49-F238E27FC236}">
+                <a16:creationId xmlns:a16="http://schemas.microsoft.com/office/drawing/2014/main" id="{D77F06AA-E9E6-441B-8895-5AF33996466C}"/>
+              </a:ext>
+            </a:extLst>
+          </p:cNvPr>
+          <p:cNvCxnSpPr>
+            <a:stCxn id="39" idx="2"/>
+            <a:endCxn id="44" idx="0"/>
+          </p:cNvCxnSpPr>
+          <p:nvPr/>
+        </p:nvCxnSpPr>
+        <p:spPr>
+          <a:xfrm>
+            <a:off x="6560862" y="6843763"/>
+            <a:ext cx="1051934" cy="1338730"/>
+          </a:xfrm>
+          <a:prstGeom prst="line">
+            <a:avLst/>
+          </a:prstGeom>
+        </p:spPr>
+        <p:style>
+          <a:lnRef idx="1">
+            <a:schemeClr val="accent1"/>
+          </a:lnRef>
+          <a:fillRef idx="0">
+            <a:schemeClr val="accent1"/>
+          </a:fillRef>
+          <a:effectRef idx="0">
+            <a:schemeClr val="accent1"/>
+          </a:effectRef>
+          <a:fontRef idx="minor">
+            <a:schemeClr val="tx1"/>
+          </a:fontRef>
+        </p:style>
+      </p:cxnSp>
+      <p:sp>
+        <p:nvSpPr>
+          <p:cNvPr id="46" name="文本框 45">
+            <a:extLst>
+              <a:ext uri="{FF2B5EF4-FFF2-40B4-BE49-F238E27FC236}">
+                <a16:creationId xmlns:a16="http://schemas.microsoft.com/office/drawing/2014/main" id="{FA088AD7-D340-4BDD-9B2B-E1BB1C95F0AE}"/>
+              </a:ext>
+            </a:extLst>
+          </p:cNvPr>
+          <p:cNvSpPr txBox="1"/>
+          <p:nvPr/>
+        </p:nvSpPr>
+        <p:spPr>
+          <a:xfrm>
+            <a:off x="3301047" y="7782153"/>
+            <a:ext cx="1018292" cy="461665"/>
+          </a:xfrm>
+          <a:prstGeom prst="rect">
+            <a:avLst/>
+          </a:prstGeom>
+          <a:noFill/>
+        </p:spPr>
+        <p:txBody>
+          <a:bodyPr wrap="none" rtlCol="0">
+            <a:spAutoFit/>
+          </a:bodyPr>
+          <a:lstStyle/>
+          <a:p>
+            <a:r>
+              <a:rPr lang="en-US" altLang="zh-CN" sz="1200" dirty="0" err="1"/>
+              <a:t>targetList:List</a:t>
+            </a:r>
+            <a:endParaRPr lang="en-US" altLang="zh-CN" sz="1200" dirty="0"/>
+          </a:p>
+          <a:p>
+            <a:r>
+              <a:rPr lang="en-US" altLang="zh-CN" sz="1200" dirty="0"/>
+              <a:t>      2 items</a:t>
+            </a:r>
+            <a:endParaRPr lang="zh-CN" altLang="en-US" sz="1200" dirty="0"/>
+          </a:p>
+        </p:txBody>
+      </p:sp>
+      <p:cxnSp>
+        <p:nvCxnSpPr>
+          <p:cNvPr id="47" name="直接连接符 46">
+            <a:extLst>
+              <a:ext uri="{FF2B5EF4-FFF2-40B4-BE49-F238E27FC236}">
+                <a16:creationId xmlns:a16="http://schemas.microsoft.com/office/drawing/2014/main" id="{5F91FA2B-396A-48A7-94D5-9182716BFD55}"/>
+              </a:ext>
+            </a:extLst>
+          </p:cNvPr>
+          <p:cNvCxnSpPr>
+            <a:stCxn id="39" idx="2"/>
+            <a:endCxn id="46" idx="0"/>
+          </p:cNvCxnSpPr>
+          <p:nvPr/>
+        </p:nvCxnSpPr>
+        <p:spPr>
+          <a:xfrm flipH="1">
+            <a:off x="3810193" y="6843763"/>
+            <a:ext cx="2750669" cy="938390"/>
+          </a:xfrm>
+          <a:prstGeom prst="line">
+            <a:avLst/>
+          </a:prstGeom>
+        </p:spPr>
+        <p:style>
+          <a:lnRef idx="1">
+            <a:schemeClr val="accent1"/>
+          </a:lnRef>
+          <a:fillRef idx="0">
+            <a:schemeClr val="accent1"/>
+          </a:fillRef>
+          <a:effectRef idx="0">
+            <a:schemeClr val="accent1"/>
+          </a:effectRef>
+          <a:fontRef idx="minor">
+            <a:schemeClr val="tx1"/>
+          </a:fontRef>
+        </p:style>
+      </p:cxnSp>
+      <p:sp>
+        <p:nvSpPr>
+          <p:cNvPr id="48" name="文本框 47">
+            <a:extLst>
+              <a:ext uri="{FF2B5EF4-FFF2-40B4-BE49-F238E27FC236}">
+                <a16:creationId xmlns:a16="http://schemas.microsoft.com/office/drawing/2014/main" id="{4963F79B-5708-45AE-8E29-91F08FBF4650}"/>
+              </a:ext>
+            </a:extLst>
+          </p:cNvPr>
+          <p:cNvSpPr txBox="1"/>
+          <p:nvPr/>
+        </p:nvSpPr>
+        <p:spPr>
+          <a:xfrm>
+            <a:off x="6391603" y="8909251"/>
+            <a:ext cx="667747" cy="276999"/>
+          </a:xfrm>
+          <a:prstGeom prst="rect">
+            <a:avLst/>
+          </a:prstGeom>
+          <a:noFill/>
+        </p:spPr>
+        <p:txBody>
+          <a:bodyPr wrap="none" rtlCol="0">
+            <a:spAutoFit/>
+          </a:bodyPr>
+          <a:lstStyle/>
+          <a:p>
+            <a:r>
+              <a:rPr lang="en-US" altLang="zh-CN" sz="1200" dirty="0" err="1"/>
+              <a:t>fromlist</a:t>
+            </a:r>
+            <a:endParaRPr lang="zh-CN" altLang="en-US" sz="1200" dirty="0"/>
+          </a:p>
+        </p:txBody>
+      </p:sp>
+      <p:sp>
+        <p:nvSpPr>
+          <p:cNvPr id="49" name="文本框 48">
+            <a:extLst>
+              <a:ext uri="{FF2B5EF4-FFF2-40B4-BE49-F238E27FC236}">
+                <a16:creationId xmlns:a16="http://schemas.microsoft.com/office/drawing/2014/main" id="{9DB6555D-94F7-4354-A9AF-D8E09E15BC50}"/>
+              </a:ext>
+            </a:extLst>
+          </p:cNvPr>
+          <p:cNvSpPr txBox="1"/>
+          <p:nvPr/>
+        </p:nvSpPr>
+        <p:spPr>
+          <a:xfrm>
+            <a:off x="8252298" y="8869985"/>
+            <a:ext cx="1015021" cy="276999"/>
+          </a:xfrm>
+          <a:prstGeom prst="rect">
+            <a:avLst/>
+          </a:prstGeom>
+          <a:noFill/>
+        </p:spPr>
+        <p:txBody>
+          <a:bodyPr wrap="none" rtlCol="0">
+            <a:spAutoFit/>
+          </a:bodyPr>
+          <a:lstStyle/>
+          <a:p>
+            <a:r>
+              <a:rPr lang="en-US" altLang="zh-CN" sz="1200" dirty="0" err="1"/>
+              <a:t>quals:OpExpr</a:t>
+            </a:r>
+            <a:endParaRPr lang="zh-CN" altLang="en-US" sz="1200" dirty="0"/>
+          </a:p>
+        </p:txBody>
+      </p:sp>
+      <p:cxnSp>
+        <p:nvCxnSpPr>
+          <p:cNvPr id="50" name="直接连接符 49">
+            <a:extLst>
+              <a:ext uri="{FF2B5EF4-FFF2-40B4-BE49-F238E27FC236}">
+                <a16:creationId xmlns:a16="http://schemas.microsoft.com/office/drawing/2014/main" id="{FBECF60A-FEAB-4AE7-8876-29731FFCED6D}"/>
+              </a:ext>
+            </a:extLst>
+          </p:cNvPr>
+          <p:cNvCxnSpPr>
+            <a:stCxn id="44" idx="2"/>
+            <a:endCxn id="48" idx="0"/>
+          </p:cNvCxnSpPr>
+          <p:nvPr/>
+        </p:nvCxnSpPr>
+        <p:spPr>
+          <a:xfrm flipH="1">
+            <a:off x="6725477" y="8459492"/>
+            <a:ext cx="887319" cy="449759"/>
+          </a:xfrm>
+          <a:prstGeom prst="line">
+            <a:avLst/>
+          </a:prstGeom>
+        </p:spPr>
+        <p:style>
+          <a:lnRef idx="1">
+            <a:schemeClr val="accent1"/>
+          </a:lnRef>
+          <a:fillRef idx="0">
+            <a:schemeClr val="accent1"/>
+          </a:fillRef>
+          <a:effectRef idx="0">
+            <a:schemeClr val="accent1"/>
+          </a:effectRef>
+          <a:fontRef idx="minor">
+            <a:schemeClr val="tx1"/>
+          </a:fontRef>
+        </p:style>
+      </p:cxnSp>
+      <p:cxnSp>
+        <p:nvCxnSpPr>
+          <p:cNvPr id="51" name="直接连接符 50">
+            <a:extLst>
+              <a:ext uri="{FF2B5EF4-FFF2-40B4-BE49-F238E27FC236}">
+                <a16:creationId xmlns:a16="http://schemas.microsoft.com/office/drawing/2014/main" id="{4CFC5C4E-0B8D-4F9B-85D0-E7202ACD73EF}"/>
+              </a:ext>
+            </a:extLst>
+          </p:cNvPr>
+          <p:cNvCxnSpPr>
+            <a:stCxn id="44" idx="2"/>
+            <a:endCxn id="49" idx="0"/>
+          </p:cNvCxnSpPr>
+          <p:nvPr/>
+        </p:nvCxnSpPr>
+        <p:spPr>
+          <a:xfrm>
+            <a:off x="7612796" y="8459492"/>
+            <a:ext cx="1147013" cy="410493"/>
+          </a:xfrm>
+          <a:prstGeom prst="line">
+            <a:avLst/>
+          </a:prstGeom>
+        </p:spPr>
+        <p:style>
+          <a:lnRef idx="1">
+            <a:schemeClr val="accent1"/>
+          </a:lnRef>
+          <a:fillRef idx="0">
+            <a:schemeClr val="accent1"/>
+          </a:fillRef>
+          <a:effectRef idx="0">
+            <a:schemeClr val="accent1"/>
+          </a:effectRef>
+          <a:fontRef idx="minor">
+            <a:schemeClr val="tx1"/>
+          </a:fontRef>
+        </p:style>
+      </p:cxnSp>
+      <p:sp>
+        <p:nvSpPr>
+          <p:cNvPr id="52" name="文本框 51">
+            <a:extLst>
+              <a:ext uri="{FF2B5EF4-FFF2-40B4-BE49-F238E27FC236}">
+                <a16:creationId xmlns:a16="http://schemas.microsoft.com/office/drawing/2014/main" id="{7AFA93F9-885A-4F60-AF8A-9219AA19E16F}"/>
+              </a:ext>
+            </a:extLst>
+          </p:cNvPr>
+          <p:cNvSpPr txBox="1"/>
+          <p:nvPr/>
+        </p:nvSpPr>
+        <p:spPr>
+          <a:xfrm>
+            <a:off x="6073068" y="9817100"/>
+            <a:ext cx="1083438" cy="461665"/>
+          </a:xfrm>
+          <a:prstGeom prst="rect">
+            <a:avLst/>
+          </a:prstGeom>
+          <a:noFill/>
+        </p:spPr>
+        <p:txBody>
+          <a:bodyPr wrap="none" rtlCol="0">
+            <a:spAutoFit/>
+          </a:bodyPr>
+          <a:lstStyle/>
+          <a:p>
+            <a:r>
+              <a:rPr lang="en-US" altLang="zh-CN" sz="1200" dirty="0"/>
+              <a:t>1:RangeTblRef</a:t>
+            </a:r>
+          </a:p>
+          <a:p>
+            <a:r>
+              <a:rPr lang="en-US" altLang="zh-CN" sz="1200" dirty="0"/>
+              <a:t>    </a:t>
+            </a:r>
+            <a:r>
+              <a:rPr lang="en-US" altLang="zh-CN" sz="1200" dirty="0" err="1"/>
+              <a:t>rtindex</a:t>
+            </a:r>
+            <a:r>
+              <a:rPr lang="en-US" altLang="zh-CN" sz="1200" dirty="0"/>
+              <a:t>=1</a:t>
+            </a:r>
+            <a:endParaRPr lang="zh-CN" altLang="en-US" sz="1200" dirty="0"/>
+          </a:p>
+        </p:txBody>
+      </p:sp>
+      <p:cxnSp>
+        <p:nvCxnSpPr>
+          <p:cNvPr id="53" name="直接连接符 52">
+            <a:extLst>
+              <a:ext uri="{FF2B5EF4-FFF2-40B4-BE49-F238E27FC236}">
+                <a16:creationId xmlns:a16="http://schemas.microsoft.com/office/drawing/2014/main" id="{CB838E23-13F1-4C6B-BF59-F70F63EE8DB1}"/>
+              </a:ext>
+            </a:extLst>
+          </p:cNvPr>
+          <p:cNvCxnSpPr>
+            <a:stCxn id="48" idx="2"/>
+            <a:endCxn id="52" idx="0"/>
+          </p:cNvCxnSpPr>
+          <p:nvPr/>
+        </p:nvCxnSpPr>
+        <p:spPr>
+          <a:xfrm flipH="1">
+            <a:off x="6614787" y="9186250"/>
+            <a:ext cx="110690" cy="630850"/>
+          </a:xfrm>
+          <a:prstGeom prst="line">
+            <a:avLst/>
+          </a:prstGeom>
+        </p:spPr>
+        <p:style>
+          <a:lnRef idx="1">
+            <a:schemeClr val="accent1"/>
+          </a:lnRef>
+          <a:fillRef idx="0">
+            <a:schemeClr val="accent1"/>
+          </a:fillRef>
+          <a:effectRef idx="0">
+            <a:schemeClr val="accent1"/>
+          </a:effectRef>
+          <a:fontRef idx="minor">
+            <a:schemeClr val="tx1"/>
+          </a:fontRef>
+        </p:style>
+      </p:cxnSp>
+      <p:sp>
+        <p:nvSpPr>
+          <p:cNvPr id="54" name="文本框 53">
+            <a:extLst>
+              <a:ext uri="{FF2B5EF4-FFF2-40B4-BE49-F238E27FC236}">
+                <a16:creationId xmlns:a16="http://schemas.microsoft.com/office/drawing/2014/main" id="{520CAF4D-9D15-4499-B05E-E679AA5DE705}"/>
+              </a:ext>
+            </a:extLst>
+          </p:cNvPr>
+          <p:cNvSpPr txBox="1"/>
+          <p:nvPr/>
+        </p:nvSpPr>
+        <p:spPr>
+          <a:xfrm>
+            <a:off x="7476367" y="9705735"/>
+            <a:ext cx="955711" cy="461665"/>
+          </a:xfrm>
+          <a:prstGeom prst="rect">
+            <a:avLst/>
+          </a:prstGeom>
+          <a:noFill/>
+        </p:spPr>
+        <p:txBody>
+          <a:bodyPr wrap="none" rtlCol="0">
+            <a:spAutoFit/>
+          </a:bodyPr>
+          <a:lstStyle/>
+          <a:p>
+            <a:r>
+              <a:rPr lang="en-US" altLang="zh-CN" sz="1200" dirty="0" err="1"/>
+              <a:t>opno</a:t>
+            </a:r>
+            <a:r>
+              <a:rPr lang="en-US" altLang="zh-CN" sz="1200" dirty="0"/>
+              <a:t>/</a:t>
+            </a:r>
+            <a:r>
+              <a:rPr lang="en-US" altLang="zh-CN" sz="1200" dirty="0" err="1"/>
+              <a:t>funcid</a:t>
+            </a:r>
+            <a:endParaRPr lang="en-US" altLang="zh-CN" sz="1200" dirty="0"/>
+          </a:p>
+          <a:p>
+            <a:r>
+              <a:rPr lang="en-US" altLang="zh-CN" sz="1200" dirty="0"/>
+              <a:t>    666/742</a:t>
+            </a:r>
+            <a:endParaRPr lang="zh-CN" altLang="en-US" sz="1200" dirty="0"/>
+          </a:p>
+        </p:txBody>
+      </p:sp>
+      <p:sp>
+        <p:nvSpPr>
+          <p:cNvPr id="55" name="文本框 54">
+            <a:extLst>
+              <a:ext uri="{FF2B5EF4-FFF2-40B4-BE49-F238E27FC236}">
+                <a16:creationId xmlns:a16="http://schemas.microsoft.com/office/drawing/2014/main" id="{19738B1E-6939-437B-952E-BE6C6043D090}"/>
+              </a:ext>
+            </a:extLst>
+          </p:cNvPr>
+          <p:cNvSpPr txBox="1"/>
+          <p:nvPr/>
+        </p:nvSpPr>
+        <p:spPr>
+          <a:xfrm>
+            <a:off x="9587998" y="9567235"/>
+            <a:ext cx="442237" cy="276999"/>
+          </a:xfrm>
+          <a:prstGeom prst="rect">
+            <a:avLst/>
+          </a:prstGeom>
+          <a:noFill/>
+        </p:spPr>
+        <p:txBody>
+          <a:bodyPr wrap="none" rtlCol="0">
+            <a:spAutoFit/>
+          </a:bodyPr>
+          <a:lstStyle/>
+          <a:p>
+            <a:r>
+              <a:rPr lang="en-US" altLang="zh-CN" sz="1200" dirty="0" err="1"/>
+              <a:t>args</a:t>
+            </a:r>
+            <a:endParaRPr lang="zh-CN" altLang="en-US" sz="1200" dirty="0"/>
+          </a:p>
+        </p:txBody>
+      </p:sp>
+      <p:cxnSp>
+        <p:nvCxnSpPr>
+          <p:cNvPr id="56" name="直接连接符 55">
+            <a:extLst>
+              <a:ext uri="{FF2B5EF4-FFF2-40B4-BE49-F238E27FC236}">
+                <a16:creationId xmlns:a16="http://schemas.microsoft.com/office/drawing/2014/main" id="{1B74D728-9026-4A6E-B623-8DD41AB00F15}"/>
+              </a:ext>
+            </a:extLst>
+          </p:cNvPr>
+          <p:cNvCxnSpPr>
+            <a:stCxn id="49" idx="2"/>
+            <a:endCxn id="54" idx="0"/>
+          </p:cNvCxnSpPr>
+          <p:nvPr/>
+        </p:nvCxnSpPr>
+        <p:spPr>
+          <a:xfrm flipH="1">
+            <a:off x="7954223" y="9146984"/>
+            <a:ext cx="805586" cy="558751"/>
+          </a:xfrm>
+          <a:prstGeom prst="line">
+            <a:avLst/>
+          </a:prstGeom>
+        </p:spPr>
+        <p:style>
+          <a:lnRef idx="1">
+            <a:schemeClr val="accent1"/>
+          </a:lnRef>
+          <a:fillRef idx="0">
+            <a:schemeClr val="accent1"/>
+          </a:fillRef>
+          <a:effectRef idx="0">
+            <a:schemeClr val="accent1"/>
+          </a:effectRef>
+          <a:fontRef idx="minor">
+            <a:schemeClr val="tx1"/>
+          </a:fontRef>
+        </p:style>
+      </p:cxnSp>
+      <p:cxnSp>
+        <p:nvCxnSpPr>
+          <p:cNvPr id="57" name="直接连接符 56">
+            <a:extLst>
+              <a:ext uri="{FF2B5EF4-FFF2-40B4-BE49-F238E27FC236}">
+                <a16:creationId xmlns:a16="http://schemas.microsoft.com/office/drawing/2014/main" id="{C112ECE5-9CAF-4F0F-ABD2-2DE289F75A20}"/>
+              </a:ext>
+            </a:extLst>
+          </p:cNvPr>
+          <p:cNvCxnSpPr>
+            <a:stCxn id="49" idx="2"/>
+            <a:endCxn id="55" idx="0"/>
+          </p:cNvCxnSpPr>
+          <p:nvPr/>
+        </p:nvCxnSpPr>
+        <p:spPr>
+          <a:xfrm>
+            <a:off x="8759809" y="9146984"/>
+            <a:ext cx="1049308" cy="420251"/>
+          </a:xfrm>
+          <a:prstGeom prst="line">
+            <a:avLst/>
+          </a:prstGeom>
+        </p:spPr>
+        <p:style>
+          <a:lnRef idx="1">
+            <a:schemeClr val="accent1"/>
+          </a:lnRef>
+          <a:fillRef idx="0">
+            <a:schemeClr val="accent1"/>
+          </a:fillRef>
+          <a:effectRef idx="0">
+            <a:schemeClr val="accent1"/>
+          </a:effectRef>
+          <a:fontRef idx="minor">
+            <a:schemeClr val="tx1"/>
+          </a:fontRef>
+        </p:style>
+      </p:cxnSp>
+      <p:sp>
+        <p:nvSpPr>
+          <p:cNvPr id="58" name="文本框 57">
+            <a:extLst>
+              <a:ext uri="{FF2B5EF4-FFF2-40B4-BE49-F238E27FC236}">
+                <a16:creationId xmlns:a16="http://schemas.microsoft.com/office/drawing/2014/main" id="{0D6A6E35-D0CE-49E8-89C5-4C7876758F8E}"/>
+              </a:ext>
+            </a:extLst>
+          </p:cNvPr>
+          <p:cNvSpPr txBox="1"/>
+          <p:nvPr/>
+        </p:nvSpPr>
+        <p:spPr>
+          <a:xfrm>
+            <a:off x="8861614" y="10306448"/>
+            <a:ext cx="1058238" cy="276999"/>
+          </a:xfrm>
+          <a:prstGeom prst="rect">
+            <a:avLst/>
+          </a:prstGeom>
+          <a:noFill/>
+        </p:spPr>
+        <p:txBody>
+          <a:bodyPr wrap="none" rtlCol="0">
+            <a:spAutoFit/>
+          </a:bodyPr>
+          <a:lstStyle/>
+          <a:p>
+            <a:r>
+              <a:rPr lang="en-US" altLang="zh-CN" sz="1200" dirty="0"/>
+              <a:t>1:RelabelType</a:t>
+            </a:r>
+            <a:endParaRPr lang="zh-CN" altLang="en-US" sz="1200" dirty="0"/>
+          </a:p>
+        </p:txBody>
+      </p:sp>
+      <p:sp>
+        <p:nvSpPr>
+          <p:cNvPr id="59" name="文本框 58">
+            <a:extLst>
+              <a:ext uri="{FF2B5EF4-FFF2-40B4-BE49-F238E27FC236}">
+                <a16:creationId xmlns:a16="http://schemas.microsoft.com/office/drawing/2014/main" id="{0BE0536D-C6AC-4978-9AE6-2E573740BBFC}"/>
+              </a:ext>
+            </a:extLst>
+          </p:cNvPr>
+          <p:cNvSpPr txBox="1"/>
+          <p:nvPr/>
+        </p:nvSpPr>
+        <p:spPr>
+          <a:xfrm>
+            <a:off x="10385830" y="10278132"/>
+            <a:ext cx="659027" cy="276999"/>
+          </a:xfrm>
+          <a:prstGeom prst="rect">
+            <a:avLst/>
+          </a:prstGeom>
+          <a:noFill/>
+        </p:spPr>
+        <p:txBody>
+          <a:bodyPr wrap="none" rtlCol="0">
+            <a:spAutoFit/>
+          </a:bodyPr>
+          <a:lstStyle/>
+          <a:p>
+            <a:r>
+              <a:rPr lang="en-US" altLang="zh-CN" sz="1200" dirty="0"/>
+              <a:t>2:Const</a:t>
+            </a:r>
+            <a:endParaRPr lang="zh-CN" altLang="en-US" sz="1200" dirty="0"/>
+          </a:p>
+        </p:txBody>
+      </p:sp>
+      <p:cxnSp>
+        <p:nvCxnSpPr>
+          <p:cNvPr id="60" name="直接连接符 59">
+            <a:extLst>
+              <a:ext uri="{FF2B5EF4-FFF2-40B4-BE49-F238E27FC236}">
+                <a16:creationId xmlns:a16="http://schemas.microsoft.com/office/drawing/2014/main" id="{A4C2CE12-39CC-4C4B-AA88-0AEA3AD15952}"/>
+              </a:ext>
+            </a:extLst>
+          </p:cNvPr>
+          <p:cNvCxnSpPr>
+            <a:cxnSpLocks/>
+            <a:stCxn id="55" idx="2"/>
+            <a:endCxn id="58" idx="0"/>
+          </p:cNvCxnSpPr>
+          <p:nvPr/>
+        </p:nvCxnSpPr>
+        <p:spPr>
+          <a:xfrm flipH="1">
+            <a:off x="9390733" y="9844234"/>
+            <a:ext cx="418384" cy="462214"/>
+          </a:xfrm>
+          <a:prstGeom prst="line">
+            <a:avLst/>
+          </a:prstGeom>
+        </p:spPr>
+        <p:style>
+          <a:lnRef idx="1">
+            <a:schemeClr val="accent1"/>
+          </a:lnRef>
+          <a:fillRef idx="0">
+            <a:schemeClr val="accent1"/>
+          </a:fillRef>
+          <a:effectRef idx="0">
+            <a:schemeClr val="accent1"/>
+          </a:effectRef>
+          <a:fontRef idx="minor">
+            <a:schemeClr val="tx1"/>
+          </a:fontRef>
+        </p:style>
+      </p:cxnSp>
+      <p:cxnSp>
+        <p:nvCxnSpPr>
+          <p:cNvPr id="61" name="直接连接符 60">
+            <a:extLst>
+              <a:ext uri="{FF2B5EF4-FFF2-40B4-BE49-F238E27FC236}">
+                <a16:creationId xmlns:a16="http://schemas.microsoft.com/office/drawing/2014/main" id="{14EE0977-5530-4944-BD7D-AA46F2CF57DB}"/>
+              </a:ext>
+            </a:extLst>
+          </p:cNvPr>
+          <p:cNvCxnSpPr>
+            <a:stCxn id="55" idx="2"/>
+            <a:endCxn id="59" idx="0"/>
+          </p:cNvCxnSpPr>
+          <p:nvPr/>
+        </p:nvCxnSpPr>
+        <p:spPr>
+          <a:xfrm>
+            <a:off x="9809117" y="9844234"/>
+            <a:ext cx="906227" cy="433898"/>
+          </a:xfrm>
+          <a:prstGeom prst="line">
+            <a:avLst/>
+          </a:prstGeom>
+        </p:spPr>
+        <p:style>
+          <a:lnRef idx="1">
+            <a:schemeClr val="accent1"/>
+          </a:lnRef>
+          <a:fillRef idx="0">
+            <a:schemeClr val="accent1"/>
+          </a:fillRef>
+          <a:effectRef idx="0">
+            <a:schemeClr val="accent1"/>
+          </a:effectRef>
+          <a:fontRef idx="minor">
+            <a:schemeClr val="tx1"/>
+          </a:fontRef>
+        </p:style>
+      </p:cxnSp>
+      <p:sp>
+        <p:nvSpPr>
+          <p:cNvPr id="62" name="文本框 61">
+            <a:extLst>
+              <a:ext uri="{FF2B5EF4-FFF2-40B4-BE49-F238E27FC236}">
+                <a16:creationId xmlns:a16="http://schemas.microsoft.com/office/drawing/2014/main" id="{6C8DD390-4C32-413C-A481-CAAA32535715}"/>
+              </a:ext>
+            </a:extLst>
+          </p:cNvPr>
+          <p:cNvSpPr txBox="1"/>
+          <p:nvPr/>
+        </p:nvSpPr>
+        <p:spPr>
+          <a:xfrm>
+            <a:off x="8795382" y="10964573"/>
+            <a:ext cx="675441" cy="276999"/>
+          </a:xfrm>
+          <a:prstGeom prst="rect">
+            <a:avLst/>
+          </a:prstGeom>
+          <a:noFill/>
+        </p:spPr>
+        <p:txBody>
+          <a:bodyPr wrap="none" rtlCol="0">
+            <a:spAutoFit/>
+          </a:bodyPr>
+          <a:lstStyle/>
+          <a:p>
+            <a:r>
+              <a:rPr lang="en-US" altLang="zh-CN" sz="1200" dirty="0" err="1"/>
+              <a:t>arg:VAR</a:t>
+            </a:r>
+            <a:endParaRPr lang="zh-CN" altLang="en-US" sz="1200" dirty="0"/>
+          </a:p>
+        </p:txBody>
+      </p:sp>
+      <p:sp>
+        <p:nvSpPr>
+          <p:cNvPr id="63" name="文本框 62">
+            <a:extLst>
+              <a:ext uri="{FF2B5EF4-FFF2-40B4-BE49-F238E27FC236}">
+                <a16:creationId xmlns:a16="http://schemas.microsoft.com/office/drawing/2014/main" id="{962A395D-F055-429A-BF1A-BF0BEBA7FB62}"/>
+              </a:ext>
+            </a:extLst>
+          </p:cNvPr>
+          <p:cNvSpPr txBox="1"/>
+          <p:nvPr/>
+        </p:nvSpPr>
+        <p:spPr>
+          <a:xfrm>
+            <a:off x="10299700" y="11174743"/>
+            <a:ext cx="871713" cy="276999"/>
+          </a:xfrm>
+          <a:prstGeom prst="rect">
+            <a:avLst/>
+          </a:prstGeom>
+          <a:noFill/>
+        </p:spPr>
+        <p:txBody>
+          <a:bodyPr wrap="none" rtlCol="0">
+            <a:spAutoFit/>
+          </a:bodyPr>
+          <a:lstStyle/>
+          <a:p>
+            <a:r>
+              <a:rPr lang="en-US" altLang="zh-CN" sz="1200" dirty="0"/>
+              <a:t>value:’901’</a:t>
+            </a:r>
+            <a:endParaRPr lang="zh-CN" altLang="en-US" sz="1200" dirty="0"/>
+          </a:p>
+        </p:txBody>
+      </p:sp>
+      <p:sp>
+        <p:nvSpPr>
+          <p:cNvPr id="64" name="文本框 63">
+            <a:extLst>
+              <a:ext uri="{FF2B5EF4-FFF2-40B4-BE49-F238E27FC236}">
+                <a16:creationId xmlns:a16="http://schemas.microsoft.com/office/drawing/2014/main" id="{06C3957A-E9AD-4BDD-B77E-C9A5098671EA}"/>
+              </a:ext>
+            </a:extLst>
+          </p:cNvPr>
+          <p:cNvSpPr txBox="1"/>
+          <p:nvPr/>
+        </p:nvSpPr>
+        <p:spPr>
+          <a:xfrm>
+            <a:off x="8493600" y="11727982"/>
+            <a:ext cx="1279004" cy="461665"/>
+          </a:xfrm>
+          <a:prstGeom prst="rect">
+            <a:avLst/>
+          </a:prstGeom>
+          <a:noFill/>
+        </p:spPr>
+        <p:txBody>
+          <a:bodyPr wrap="none" rtlCol="0">
+            <a:spAutoFit/>
+          </a:bodyPr>
+          <a:lstStyle/>
+          <a:p>
+            <a:r>
+              <a:rPr lang="en-US" altLang="zh-CN" sz="1200" dirty="0" err="1"/>
+              <a:t>varno</a:t>
+            </a:r>
+            <a:r>
+              <a:rPr lang="en-US" altLang="zh-CN" sz="1200" dirty="0"/>
+              <a:t>/</a:t>
+            </a:r>
+            <a:r>
+              <a:rPr lang="en-US" altLang="zh-CN" sz="1200" dirty="0" err="1"/>
+              <a:t>attno</a:t>
+            </a:r>
+            <a:r>
+              <a:rPr lang="en-US" altLang="zh-CN" sz="1200" dirty="0"/>
+              <a:t>/type</a:t>
+            </a:r>
+          </a:p>
+          <a:p>
+            <a:r>
+              <a:rPr lang="en-US" altLang="zh-CN" sz="1200" dirty="0"/>
+              <a:t>     1/2/1043</a:t>
+            </a:r>
+            <a:endParaRPr lang="zh-CN" altLang="en-US" sz="1200" dirty="0"/>
+          </a:p>
+        </p:txBody>
+      </p:sp>
+      <p:cxnSp>
+        <p:nvCxnSpPr>
+          <p:cNvPr id="65" name="直接连接符 64">
+            <a:extLst>
+              <a:ext uri="{FF2B5EF4-FFF2-40B4-BE49-F238E27FC236}">
+                <a16:creationId xmlns:a16="http://schemas.microsoft.com/office/drawing/2014/main" id="{438F050A-15A9-4C38-9641-5139A41433A1}"/>
+              </a:ext>
+            </a:extLst>
+          </p:cNvPr>
+          <p:cNvCxnSpPr>
+            <a:stCxn id="58" idx="2"/>
+            <a:endCxn id="62" idx="0"/>
+          </p:cNvCxnSpPr>
+          <p:nvPr/>
+        </p:nvCxnSpPr>
+        <p:spPr>
+          <a:xfrm flipH="1">
+            <a:off x="9133103" y="10583447"/>
+            <a:ext cx="257630" cy="381126"/>
+          </a:xfrm>
+          <a:prstGeom prst="line">
+            <a:avLst/>
+          </a:prstGeom>
+        </p:spPr>
+        <p:style>
+          <a:lnRef idx="1">
+            <a:schemeClr val="accent1"/>
+          </a:lnRef>
+          <a:fillRef idx="0">
+            <a:schemeClr val="accent1"/>
+          </a:fillRef>
+          <a:effectRef idx="0">
+            <a:schemeClr val="accent1"/>
+          </a:effectRef>
+          <a:fontRef idx="minor">
+            <a:schemeClr val="tx1"/>
+          </a:fontRef>
+        </p:style>
+      </p:cxnSp>
+      <p:cxnSp>
+        <p:nvCxnSpPr>
+          <p:cNvPr id="66" name="直接连接符 65">
+            <a:extLst>
+              <a:ext uri="{FF2B5EF4-FFF2-40B4-BE49-F238E27FC236}">
+                <a16:creationId xmlns:a16="http://schemas.microsoft.com/office/drawing/2014/main" id="{5D923CA7-D5E7-4707-B979-8BC55A1D8F2D}"/>
+              </a:ext>
+            </a:extLst>
+          </p:cNvPr>
+          <p:cNvCxnSpPr>
+            <a:stCxn id="59" idx="2"/>
+            <a:endCxn id="63" idx="0"/>
+          </p:cNvCxnSpPr>
+          <p:nvPr/>
+        </p:nvCxnSpPr>
+        <p:spPr>
+          <a:xfrm>
+            <a:off x="10715344" y="10555131"/>
+            <a:ext cx="20213" cy="619612"/>
+          </a:xfrm>
+          <a:prstGeom prst="line">
+            <a:avLst/>
+          </a:prstGeom>
+        </p:spPr>
+        <p:style>
+          <a:lnRef idx="1">
+            <a:schemeClr val="accent1"/>
+          </a:lnRef>
+          <a:fillRef idx="0">
+            <a:schemeClr val="accent1"/>
+          </a:fillRef>
+          <a:effectRef idx="0">
+            <a:schemeClr val="accent1"/>
+          </a:effectRef>
+          <a:fontRef idx="minor">
+            <a:schemeClr val="tx1"/>
+          </a:fontRef>
+        </p:style>
+      </p:cxnSp>
+      <p:cxnSp>
+        <p:nvCxnSpPr>
+          <p:cNvPr id="67" name="直接连接符 66">
+            <a:extLst>
+              <a:ext uri="{FF2B5EF4-FFF2-40B4-BE49-F238E27FC236}">
+                <a16:creationId xmlns:a16="http://schemas.microsoft.com/office/drawing/2014/main" id="{957877E4-072D-4410-B5D8-CF49B755B076}"/>
+              </a:ext>
+            </a:extLst>
+          </p:cNvPr>
+          <p:cNvCxnSpPr>
+            <a:stCxn id="62" idx="2"/>
+            <a:endCxn id="64" idx="0"/>
+          </p:cNvCxnSpPr>
+          <p:nvPr/>
+        </p:nvCxnSpPr>
+        <p:spPr>
+          <a:xfrm flipH="1">
+            <a:off x="9133102" y="11241572"/>
+            <a:ext cx="1" cy="486410"/>
+          </a:xfrm>
+          <a:prstGeom prst="line">
+            <a:avLst/>
+          </a:prstGeom>
+        </p:spPr>
+        <p:style>
+          <a:lnRef idx="1">
+            <a:schemeClr val="accent1"/>
+          </a:lnRef>
+          <a:fillRef idx="0">
+            <a:schemeClr val="accent1"/>
+          </a:fillRef>
+          <a:effectRef idx="0">
+            <a:schemeClr val="accent1"/>
+          </a:effectRef>
+          <a:fontRef idx="minor">
+            <a:schemeClr val="tx1"/>
+          </a:fontRef>
+        </p:style>
+      </p:cxnSp>
+      <p:cxnSp>
+        <p:nvCxnSpPr>
+          <p:cNvPr id="68" name="直接连接符 67">
+            <a:extLst>
+              <a:ext uri="{FF2B5EF4-FFF2-40B4-BE49-F238E27FC236}">
+                <a16:creationId xmlns:a16="http://schemas.microsoft.com/office/drawing/2014/main" id="{53D36EFD-5F68-439B-854C-9275CB01E508}"/>
+              </a:ext>
+            </a:extLst>
+          </p:cNvPr>
+          <p:cNvCxnSpPr>
+            <a:stCxn id="8" idx="2"/>
+            <a:endCxn id="39" idx="0"/>
+          </p:cNvCxnSpPr>
+          <p:nvPr/>
+        </p:nvCxnSpPr>
+        <p:spPr>
+          <a:xfrm flipH="1">
+            <a:off x="6560862" y="6225507"/>
+            <a:ext cx="576889" cy="341257"/>
+          </a:xfrm>
+          <a:prstGeom prst="line">
+            <a:avLst/>
+          </a:prstGeom>
+        </p:spPr>
+        <p:style>
+          <a:lnRef idx="1">
+            <a:schemeClr val="accent1"/>
+          </a:lnRef>
+          <a:fillRef idx="0">
+            <a:schemeClr val="accent1"/>
+          </a:fillRef>
+          <a:effectRef idx="0">
+            <a:schemeClr val="accent1"/>
+          </a:effectRef>
+          <a:fontRef idx="minor">
+            <a:schemeClr val="tx1"/>
+          </a:fontRef>
+        </p:style>
+      </p:cxnSp>
+      <p:sp>
+        <p:nvSpPr>
+          <p:cNvPr id="69" name="文本框 68">
+            <a:extLst>
+              <a:ext uri="{FF2B5EF4-FFF2-40B4-BE49-F238E27FC236}">
+                <a16:creationId xmlns:a16="http://schemas.microsoft.com/office/drawing/2014/main" id="{D5AACE7F-ECC5-4D03-A8BD-57EAB3642627}"/>
+              </a:ext>
+            </a:extLst>
+          </p:cNvPr>
+          <p:cNvSpPr txBox="1"/>
+          <p:nvPr/>
+        </p:nvSpPr>
+        <p:spPr>
+          <a:xfrm>
+            <a:off x="2091396" y="8749179"/>
+            <a:ext cx="1018933" cy="461665"/>
+          </a:xfrm>
+          <a:prstGeom prst="rect">
+            <a:avLst/>
+          </a:prstGeom>
+          <a:noFill/>
+        </p:spPr>
+        <p:txBody>
+          <a:bodyPr wrap="none" rtlCol="0">
+            <a:spAutoFit/>
+          </a:bodyPr>
+          <a:lstStyle/>
+          <a:p>
+            <a:r>
+              <a:rPr lang="en-US" altLang="zh-CN" sz="1200" dirty="0"/>
+              <a:t>1:TargetEntry</a:t>
+            </a:r>
+          </a:p>
+          <a:p>
+            <a:r>
+              <a:rPr lang="en-US" altLang="zh-CN" sz="1200" dirty="0"/>
+              <a:t>   (‘</a:t>
+            </a:r>
+            <a:r>
+              <a:rPr lang="en-US" altLang="zh-CN" sz="1200" dirty="0" err="1"/>
+              <a:t>dwbh</a:t>
+            </a:r>
+            <a:r>
+              <a:rPr lang="en-US" altLang="zh-CN" sz="1200" dirty="0"/>
+              <a:t>’)</a:t>
+            </a:r>
+            <a:endParaRPr lang="zh-CN" altLang="en-US" sz="1200" dirty="0"/>
+          </a:p>
+        </p:txBody>
+      </p:sp>
+      <p:sp>
+        <p:nvSpPr>
+          <p:cNvPr id="70" name="文本框 69">
+            <a:extLst>
+              <a:ext uri="{FF2B5EF4-FFF2-40B4-BE49-F238E27FC236}">
+                <a16:creationId xmlns:a16="http://schemas.microsoft.com/office/drawing/2014/main" id="{62E220DC-1036-488C-9655-AD452E14A0E9}"/>
+              </a:ext>
+            </a:extLst>
+          </p:cNvPr>
+          <p:cNvSpPr txBox="1"/>
+          <p:nvPr/>
+        </p:nvSpPr>
+        <p:spPr>
+          <a:xfrm>
+            <a:off x="3401919" y="8749179"/>
+            <a:ext cx="1018933" cy="461665"/>
+          </a:xfrm>
+          <a:prstGeom prst="rect">
+            <a:avLst/>
+          </a:prstGeom>
+          <a:noFill/>
+        </p:spPr>
+        <p:txBody>
+          <a:bodyPr wrap="none" rtlCol="0">
+            <a:spAutoFit/>
+          </a:bodyPr>
+          <a:lstStyle/>
+          <a:p>
+            <a:r>
+              <a:rPr lang="en-US" altLang="zh-CN" sz="1200" dirty="0"/>
+              <a:t>2:TargetEntry</a:t>
+            </a:r>
+          </a:p>
+          <a:p>
+            <a:r>
+              <a:rPr lang="en-US" altLang="zh-CN" sz="1200" dirty="0"/>
+              <a:t>   (‘</a:t>
+            </a:r>
+            <a:r>
+              <a:rPr lang="en-US" altLang="zh-CN" sz="1200" dirty="0" err="1"/>
+              <a:t>grbh</a:t>
+            </a:r>
+            <a:r>
+              <a:rPr lang="en-US" altLang="zh-CN" sz="1200" dirty="0"/>
+              <a:t>’)</a:t>
+            </a:r>
+            <a:endParaRPr lang="zh-CN" altLang="en-US" sz="1200" dirty="0"/>
+          </a:p>
+        </p:txBody>
+      </p:sp>
+      <p:sp>
+        <p:nvSpPr>
+          <p:cNvPr id="71" name="文本框 70">
+            <a:extLst>
+              <a:ext uri="{FF2B5EF4-FFF2-40B4-BE49-F238E27FC236}">
+                <a16:creationId xmlns:a16="http://schemas.microsoft.com/office/drawing/2014/main" id="{3E26C17B-11B8-4681-8761-C81B121535FB}"/>
+              </a:ext>
+            </a:extLst>
+          </p:cNvPr>
+          <p:cNvSpPr txBox="1"/>
+          <p:nvPr/>
+        </p:nvSpPr>
+        <p:spPr>
+          <a:xfrm>
+            <a:off x="2247881" y="9540101"/>
+            <a:ext cx="705962" cy="276999"/>
+          </a:xfrm>
+          <a:prstGeom prst="rect">
+            <a:avLst/>
+          </a:prstGeom>
+          <a:noFill/>
+        </p:spPr>
+        <p:txBody>
+          <a:bodyPr wrap="none" rtlCol="0">
+            <a:spAutoFit/>
+          </a:bodyPr>
+          <a:lstStyle/>
+          <a:p>
+            <a:r>
+              <a:rPr lang="en-US" altLang="zh-CN" sz="1200" dirty="0" err="1"/>
+              <a:t>expr:Var</a:t>
+            </a:r>
+            <a:endParaRPr lang="zh-CN" altLang="en-US" sz="1200" dirty="0"/>
+          </a:p>
+        </p:txBody>
+      </p:sp>
+      <p:sp>
+        <p:nvSpPr>
+          <p:cNvPr id="72" name="文本框 71">
+            <a:extLst>
+              <a:ext uri="{FF2B5EF4-FFF2-40B4-BE49-F238E27FC236}">
+                <a16:creationId xmlns:a16="http://schemas.microsoft.com/office/drawing/2014/main" id="{6788B3E3-A288-417A-A8D7-255847321BC1}"/>
+              </a:ext>
+            </a:extLst>
+          </p:cNvPr>
+          <p:cNvSpPr txBox="1"/>
+          <p:nvPr/>
+        </p:nvSpPr>
+        <p:spPr>
+          <a:xfrm>
+            <a:off x="2035932" y="10264486"/>
+            <a:ext cx="1074397" cy="461665"/>
+          </a:xfrm>
+          <a:prstGeom prst="rect">
+            <a:avLst/>
+          </a:prstGeom>
+          <a:noFill/>
+        </p:spPr>
+        <p:txBody>
+          <a:bodyPr wrap="none" rtlCol="0">
+            <a:spAutoFit/>
+          </a:bodyPr>
+          <a:lstStyle/>
+          <a:p>
+            <a:r>
+              <a:rPr lang="en-US" altLang="zh-CN" sz="1200" dirty="0"/>
+              <a:t>no/</a:t>
+            </a:r>
+            <a:r>
+              <a:rPr lang="en-US" altLang="zh-CN" sz="1200" dirty="0" err="1"/>
+              <a:t>attno</a:t>
+            </a:r>
+            <a:r>
+              <a:rPr lang="en-US" altLang="zh-CN" sz="1200" dirty="0"/>
+              <a:t>/type</a:t>
+            </a:r>
+          </a:p>
+          <a:p>
+            <a:r>
+              <a:rPr lang="en-US" altLang="zh-CN" sz="1200" dirty="0"/>
+              <a:t>     1/1/1043</a:t>
+            </a:r>
+            <a:endParaRPr lang="zh-CN" altLang="en-US" sz="1200" dirty="0"/>
+          </a:p>
+        </p:txBody>
+      </p:sp>
+      <p:cxnSp>
+        <p:nvCxnSpPr>
+          <p:cNvPr id="73" name="直接连接符 72">
+            <a:extLst>
+              <a:ext uri="{FF2B5EF4-FFF2-40B4-BE49-F238E27FC236}">
+                <a16:creationId xmlns:a16="http://schemas.microsoft.com/office/drawing/2014/main" id="{17586881-01D0-4B72-9FC0-E649EAA098C0}"/>
+              </a:ext>
+            </a:extLst>
+          </p:cNvPr>
+          <p:cNvCxnSpPr>
+            <a:stCxn id="69" idx="2"/>
+            <a:endCxn id="71" idx="0"/>
+          </p:cNvCxnSpPr>
+          <p:nvPr/>
+        </p:nvCxnSpPr>
+        <p:spPr>
+          <a:xfrm flipH="1">
+            <a:off x="2600862" y="9210844"/>
+            <a:ext cx="1" cy="329257"/>
+          </a:xfrm>
+          <a:prstGeom prst="line">
+            <a:avLst/>
+          </a:prstGeom>
+        </p:spPr>
+        <p:style>
+          <a:lnRef idx="1">
+            <a:schemeClr val="accent1"/>
+          </a:lnRef>
+          <a:fillRef idx="0">
+            <a:schemeClr val="accent1"/>
+          </a:fillRef>
+          <a:effectRef idx="0">
+            <a:schemeClr val="accent1"/>
+          </a:effectRef>
+          <a:fontRef idx="minor">
+            <a:schemeClr val="tx1"/>
+          </a:fontRef>
+        </p:style>
+      </p:cxnSp>
+      <p:cxnSp>
+        <p:nvCxnSpPr>
+          <p:cNvPr id="74" name="直接连接符 73">
+            <a:extLst>
+              <a:ext uri="{FF2B5EF4-FFF2-40B4-BE49-F238E27FC236}">
+                <a16:creationId xmlns:a16="http://schemas.microsoft.com/office/drawing/2014/main" id="{09712F55-1C90-4F81-82F7-CE9F347CE19A}"/>
+              </a:ext>
+            </a:extLst>
+          </p:cNvPr>
+          <p:cNvCxnSpPr>
+            <a:stCxn id="71" idx="2"/>
+            <a:endCxn id="72" idx="0"/>
+          </p:cNvCxnSpPr>
+          <p:nvPr/>
+        </p:nvCxnSpPr>
+        <p:spPr>
+          <a:xfrm flipH="1">
+            <a:off x="2573131" y="9817100"/>
+            <a:ext cx="27731" cy="447386"/>
+          </a:xfrm>
+          <a:prstGeom prst="line">
+            <a:avLst/>
+          </a:prstGeom>
+        </p:spPr>
+        <p:style>
+          <a:lnRef idx="1">
+            <a:schemeClr val="accent1"/>
+          </a:lnRef>
+          <a:fillRef idx="0">
+            <a:schemeClr val="accent1"/>
+          </a:fillRef>
+          <a:effectRef idx="0">
+            <a:schemeClr val="accent1"/>
+          </a:effectRef>
+          <a:fontRef idx="minor">
+            <a:schemeClr val="tx1"/>
+          </a:fontRef>
+        </p:style>
+      </p:cxnSp>
+      <p:cxnSp>
+        <p:nvCxnSpPr>
+          <p:cNvPr id="75" name="直接连接符 74">
+            <a:extLst>
+              <a:ext uri="{FF2B5EF4-FFF2-40B4-BE49-F238E27FC236}">
+                <a16:creationId xmlns:a16="http://schemas.microsoft.com/office/drawing/2014/main" id="{BEA71AB2-F756-4A62-B123-52B6E586399E}"/>
+              </a:ext>
+            </a:extLst>
+          </p:cNvPr>
+          <p:cNvCxnSpPr>
+            <a:stCxn id="46" idx="2"/>
+            <a:endCxn id="70" idx="0"/>
+          </p:cNvCxnSpPr>
+          <p:nvPr/>
+        </p:nvCxnSpPr>
+        <p:spPr>
+          <a:xfrm>
+            <a:off x="3810193" y="8243818"/>
+            <a:ext cx="101193" cy="505361"/>
+          </a:xfrm>
+          <a:prstGeom prst="line">
+            <a:avLst/>
+          </a:prstGeom>
+        </p:spPr>
+        <p:style>
+          <a:lnRef idx="1">
+            <a:schemeClr val="accent1"/>
+          </a:lnRef>
+          <a:fillRef idx="0">
+            <a:schemeClr val="accent1"/>
+          </a:fillRef>
+          <a:effectRef idx="0">
+            <a:schemeClr val="accent1"/>
+          </a:effectRef>
+          <a:fontRef idx="minor">
+            <a:schemeClr val="tx1"/>
+          </a:fontRef>
+        </p:style>
+      </p:cxnSp>
+      <p:cxnSp>
+        <p:nvCxnSpPr>
+          <p:cNvPr id="76" name="直接连接符 75">
+            <a:extLst>
+              <a:ext uri="{FF2B5EF4-FFF2-40B4-BE49-F238E27FC236}">
+                <a16:creationId xmlns:a16="http://schemas.microsoft.com/office/drawing/2014/main" id="{70A9C7BD-BE81-44C3-89C3-64CB3ED7D075}"/>
+              </a:ext>
+            </a:extLst>
+          </p:cNvPr>
+          <p:cNvCxnSpPr>
+            <a:stCxn id="46" idx="2"/>
+            <a:endCxn id="69" idx="0"/>
+          </p:cNvCxnSpPr>
+          <p:nvPr/>
+        </p:nvCxnSpPr>
+        <p:spPr>
+          <a:xfrm flipH="1">
+            <a:off x="2600863" y="8243818"/>
+            <a:ext cx="1209330" cy="505361"/>
+          </a:xfrm>
+          <a:prstGeom prst="line">
+            <a:avLst/>
+          </a:prstGeom>
+        </p:spPr>
+        <p:style>
+          <a:lnRef idx="1">
+            <a:schemeClr val="accent1"/>
+          </a:lnRef>
+          <a:fillRef idx="0">
+            <a:schemeClr val="accent1"/>
+          </a:fillRef>
+          <a:effectRef idx="0">
+            <a:schemeClr val="accent1"/>
+          </a:effectRef>
+          <a:fontRef idx="minor">
+            <a:schemeClr val="tx1"/>
+          </a:fontRef>
+        </p:style>
+      </p:cxnSp>
+    </p:spTree>
+    <p:extLst>
+      <p:ext uri="{BB962C8B-B14F-4D97-AF65-F5344CB8AC3E}">
+        <p14:creationId xmlns:p14="http://schemas.microsoft.com/office/powerpoint/2010/main" val="3474234863"/>
+      </p:ext>
+    </p:extLst>
+  </p:cSld>
+  <p:clrMapOvr>
+    <a:masterClrMapping/>
+  </p:clrMapOvr>
+</p:sld>
+</file>
+
 <file path=ppt/theme/theme1.xml><?xml version="1.0" encoding="utf-8"?>
 <a:theme xmlns:a="http://schemas.openxmlformats.org/drawingml/2006/main" name="Office 主题​​">
   <a:themeElements>
